--- a/financial-dashboard-deck - Bayu Istantoro.pptx
+++ b/financial-dashboard-deck - Bayu Istantoro.pptx
@@ -4,6 +4,9 @@
   <p:sldMasterIdLst>
     <p:sldMasterId id="2147483648" r:id="rId1"/>
   </p:sldMasterIdLst>
+  <p:notesMasterIdLst>
+    <p:notesMasterId r:id="rId12"/>
+  </p:notesMasterIdLst>
   <p:sldIdLst>
     <p:sldId id="256" r:id="rId2"/>
     <p:sldId id="257" r:id="rId3"/>
@@ -16,10 +19,7 @@
     <p:sldId id="264" r:id="rId10"/>
     <p:sldId id="265" r:id="rId11"/>
   </p:sldIdLst>
-  <p:notesMasterIdLst>
-    <p:notesMasterId r:id="rId12"/>
-  </p:notesMasterIdLst>
-  <p:sldSz cx="9144000" cy="5143500"/>
+  <p:sldSz cx="9144000" cy="5143500" type="screen16x9"/>
   <p:notesSz cx="5143500" cy="9144000"/>
   <p:defaultTextStyle>
     <a:lvl1pPr marL="0" algn="l" defTabSz="914400" rtl="0" eaLnBrk="1" latinLnBrk="0" hangingPunct="1">
@@ -113,6 +113,11 @@
       </a:defRPr>
     </a:lvl9pPr>
   </p:defaultTextStyle>
+  <p:extLst>
+    <p:ext uri="{EFAFB233-063F-42B5-8137-9DF3F51BA10A}">
+      <p15:sldGuideLst xmlns:p15="http://schemas.microsoft.com/office/powerpoint/2012/main"/>
+    </p:ext>
+  </p:extLst>
 </p:presentation>
 </file>
 
@@ -138,234 +143,10 @@
           <a:chExt cx="0" cy="0"/>
         </a:xfrm>
       </p:grpSpPr>
-      <p:sp>
-        <p:nvSpPr>
-          <p:cNvPr id="2" name="Header Placeholder 1"/>
-          <p:cNvSpPr>
-            <a:spLocks noGrp="1"/>
-          </p:cNvSpPr>
-          <p:nvPr>
-            <p:ph type="hdr" sz="quarter"/>
-          </p:nvPr>
-        </p:nvSpPr>
-        <p:spPr>
-          <a:xfrm>
-            <a:off x="0" y="0"/>
-            <a:ext cx="2971800" cy="458788"/>
-          </a:xfrm>
-          <a:prstGeom prst="rect">
-            <a:avLst/>
-          </a:prstGeom>
-        </p:spPr>
-        <p:txBody>
-          <a:bodyPr vert="horz" lIns="91440" tIns="45720" rIns="91440" bIns="45720" rtlCol="0"/>
-          <a:lstStyle>
-            <a:lvl1pPr algn="l">
-              <a:defRPr sz="1200"/>
-            </a:lvl1pPr>
-          </a:lstStyle>
-          <a:p>
-            <a:endParaRPr lang="en-US"/>
-          </a:p>
-        </p:txBody>
-      </p:sp>
-      <p:sp>
-        <p:nvSpPr>
-          <p:cNvPr id="3" name="Date Placeholder 2"/>
-          <p:cNvSpPr>
-            <a:spLocks noGrp="1"/>
-          </p:cNvSpPr>
-          <p:nvPr>
-            <p:ph type="dt" idx="1"/>
-          </p:nvPr>
-        </p:nvSpPr>
-        <p:spPr>
-          <a:xfrm>
-            <a:off x="3884613" y="0"/>
-            <a:ext cx="2971800" cy="458788"/>
-          </a:xfrm>
-          <a:prstGeom prst="rect">
-            <a:avLst/>
-          </a:prstGeom>
-        </p:spPr>
-        <p:txBody>
-          <a:bodyPr vert="horz" lIns="91440" tIns="45720" rIns="91440" bIns="45720" rtlCol="0"/>
-          <a:lstStyle>
-            <a:lvl1pPr algn="r">
-              <a:defRPr sz="1200"/>
-            </a:lvl1pPr>
-          </a:lstStyle>
-          <a:p>
-            <a:fld id="{5282F153-3F37-0F45-9E97-73ACFA13230C}" type="datetimeFigureOut">
-              <a:rPr lang="en-US"/>
-              <a:t>7/23/19</a:t>
-            </a:fld>
-            <a:endParaRPr lang="en-US"/>
-          </a:p>
-        </p:txBody>
-      </p:sp>
-      <p:sp>
-        <p:nvSpPr>
-          <p:cNvPr id="4" name="Slide Image Placeholder 3"/>
-          <p:cNvSpPr>
-            <a:spLocks noGrp="1" noRot="1" noChangeAspect="1"/>
-          </p:cNvSpPr>
-          <p:nvPr>
-            <p:ph type="sldImg" idx="2"/>
-          </p:nvPr>
-        </p:nvSpPr>
-        <p:spPr>
-          <a:xfrm>
-            <a:off x="685800" y="1143000"/>
-            <a:ext cx="5486400" cy="3086100"/>
-          </a:xfrm>
-          <a:prstGeom prst="rect">
-            <a:avLst/>
-          </a:prstGeom>
-          <a:noFill/>
-          <a:ln w="12700">
-            <a:solidFill>
-              <a:prstClr val="black"/>
-            </a:solidFill>
-          </a:ln>
-        </p:spPr>
-        <p:txBody>
-          <a:bodyPr vert="horz" lIns="91440" tIns="45720" rIns="91440" bIns="45720" rtlCol="0" anchor="ctr"/>
-          <a:lstStyle/>
-          <a:p>
-            <a:endParaRPr lang="en-US"/>
-          </a:p>
-        </p:txBody>
-      </p:sp>
-      <p:sp>
-        <p:nvSpPr>
-          <p:cNvPr id="5" name="Notes Placeholder 4"/>
-          <p:cNvSpPr>
-            <a:spLocks noGrp="1"/>
-          </p:cNvSpPr>
-          <p:nvPr>
-            <p:ph type="body" sz="quarter" idx="3"/>
-          </p:nvPr>
-        </p:nvSpPr>
-        <p:spPr>
-          <a:xfrm>
-            <a:off x="685800" y="4400550"/>
-            <a:ext cx="5486400" cy="3600450"/>
-          </a:xfrm>
-          <a:prstGeom prst="rect">
-            <a:avLst/>
-          </a:prstGeom>
-        </p:spPr>
-        <p:txBody>
-          <a:bodyPr vert="horz" lIns="91440" tIns="45720" rIns="91440" bIns="45720" rtlCol="0"/>
-          <a:lstStyle/>
-          <a:p>
-            <a:pPr lvl="0"/>
-            <a:r>
-              <a:rPr lang="en-US"/>
-              <a:t>Click to edit Master text styles</a:t>
-            </a:r>
-          </a:p>
-          <a:p>
-            <a:pPr lvl="1"/>
-            <a:r>
-              <a:rPr lang="en-US"/>
-              <a:t>Second level</a:t>
-            </a:r>
-          </a:p>
-          <a:p>
-            <a:pPr lvl="2"/>
-            <a:r>
-              <a:rPr lang="en-US"/>
-              <a:t>Third level</a:t>
-            </a:r>
-          </a:p>
-          <a:p>
-            <a:pPr lvl="3"/>
-            <a:r>
-              <a:rPr lang="en-US"/>
-              <a:t>Fourth level</a:t>
-            </a:r>
-          </a:p>
-          <a:p>
-            <a:pPr lvl="4"/>
-            <a:r>
-              <a:rPr lang="en-US"/>
-              <a:t>Fifth level</a:t>
-            </a:r>
-          </a:p>
-        </p:txBody>
-      </p:sp>
-      <p:sp>
-        <p:nvSpPr>
-          <p:cNvPr id="6" name="Footer Placeholder 5"/>
-          <p:cNvSpPr>
-            <a:spLocks noGrp="1"/>
-          </p:cNvSpPr>
-          <p:nvPr>
-            <p:ph type="ftr" sz="quarter" idx="4"/>
-          </p:nvPr>
-        </p:nvSpPr>
-        <p:spPr>
-          <a:xfrm>
-            <a:off x="0" y="8685213"/>
-            <a:ext cx="2971800" cy="458787"/>
-          </a:xfrm>
-          <a:prstGeom prst="rect">
-            <a:avLst/>
-          </a:prstGeom>
-        </p:spPr>
-        <p:txBody>
-          <a:bodyPr vert="horz" lIns="91440" tIns="45720" rIns="91440" bIns="45720" rtlCol="0" anchor="b"/>
-          <a:lstStyle>
-            <a:lvl1pPr algn="l">
-              <a:defRPr sz="1200"/>
-            </a:lvl1pPr>
-          </a:lstStyle>
-          <a:p>
-            <a:endParaRPr lang="en-US"/>
-          </a:p>
-        </p:txBody>
-      </p:sp>
-      <p:sp>
-        <p:nvSpPr>
-          <p:cNvPr id="7" name="Slide Number Placeholder 6"/>
-          <p:cNvSpPr>
-            <a:spLocks noGrp="1"/>
-          </p:cNvSpPr>
-          <p:nvPr>
-            <p:ph type="sldNum" sz="quarter" idx="5"/>
-          </p:nvPr>
-        </p:nvSpPr>
-        <p:spPr>
-          <a:xfrm>
-            <a:off x="3884613" y="8685213"/>
-            <a:ext cx="2971800" cy="458787"/>
-          </a:xfrm>
-          <a:prstGeom prst="rect">
-            <a:avLst/>
-          </a:prstGeom>
-        </p:spPr>
-        <p:txBody>
-          <a:bodyPr vert="horz" lIns="91440" tIns="45720" rIns="91440" bIns="45720" rtlCol="0" anchor="b"/>
-          <a:lstStyle>
-            <a:lvl1pPr algn="r">
-              <a:defRPr sz="1200"/>
-            </a:lvl1pPr>
-          </a:lstStyle>
-          <a:p>
-            <a:fld id="{CE5E9CC1-C706-0F49-92D6-E571CC5EEA8F}" type="slidenum">
-              <a:rPr lang="en-US"/>
-              <a:t>‹#›</a:t>
-            </a:fld>
-            <a:endParaRPr lang="en-US"/>
-          </a:p>
-        </p:txBody>
-      </p:sp>
     </p:spTree>
     <p:extLst>
       <p:ext uri="{BB962C8B-B14F-4D97-AF65-F5344CB8AC3E}">
-        <p14:creationId xmlns:p14="http://schemas.microsoft.com/office/powerpoint/2010/main" val="1024086991"/>
+        <p14:creationId xmlns:p14="http://schemas.microsoft.com/office/powerpoint/2010/main" val="3424391206"/>
       </p:ext>
     </p:extLst>
   </p:cSld>
@@ -509,10 +290,6 @@
           <a:bodyPr/>
           <a:lstStyle/>
           <a:p>
-            <a:r>
-              <a:rPr lang="en-US" dirty="0"/>
-              <a:t/>
-            </a:r>
             <a:endParaRPr lang="en-US" dirty="0"/>
           </a:p>
         </p:txBody>
@@ -597,10 +374,6 @@
           <a:bodyPr/>
           <a:lstStyle/>
           <a:p>
-            <a:r>
-              <a:rPr lang="en-US" dirty="0"/>
-              <a:t/>
-            </a:r>
             <a:endParaRPr lang="en-US" dirty="0"/>
           </a:p>
         </p:txBody>
@@ -685,10 +458,6 @@
           <a:bodyPr/>
           <a:lstStyle/>
           <a:p>
-            <a:r>
-              <a:rPr lang="en-US" dirty="0"/>
-              <a:t/>
-            </a:r>
             <a:endParaRPr lang="en-US" dirty="0"/>
           </a:p>
         </p:txBody>
@@ -773,10 +542,6 @@
           <a:bodyPr/>
           <a:lstStyle/>
           <a:p>
-            <a:r>
-              <a:rPr lang="en-US" dirty="0"/>
-              <a:t/>
-            </a:r>
             <a:endParaRPr lang="en-US" dirty="0"/>
           </a:p>
         </p:txBody>
@@ -861,10 +626,6 @@
           <a:bodyPr/>
           <a:lstStyle/>
           <a:p>
-            <a:r>
-              <a:rPr lang="en-US" dirty="0"/>
-              <a:t/>
-            </a:r>
             <a:endParaRPr lang="en-US" dirty="0"/>
           </a:p>
         </p:txBody>
@@ -949,10 +710,6 @@
           <a:bodyPr/>
           <a:lstStyle/>
           <a:p>
-            <a:r>
-              <a:rPr lang="en-US" dirty="0"/>
-              <a:t/>
-            </a:r>
             <a:endParaRPr lang="en-US" dirty="0"/>
           </a:p>
         </p:txBody>
@@ -1037,10 +794,6 @@
           <a:bodyPr/>
           <a:lstStyle/>
           <a:p>
-            <a:r>
-              <a:rPr lang="en-US" dirty="0"/>
-              <a:t/>
-            </a:r>
             <a:endParaRPr lang="en-US" dirty="0"/>
           </a:p>
         </p:txBody>
@@ -1125,10 +878,6 @@
           <a:bodyPr/>
           <a:lstStyle/>
           <a:p>
-            <a:r>
-              <a:rPr lang="en-US" dirty="0"/>
-              <a:t/>
-            </a:r>
             <a:endParaRPr lang="en-US" dirty="0"/>
           </a:p>
         </p:txBody>
@@ -1213,10 +962,6 @@
           <a:bodyPr/>
           <a:lstStyle/>
           <a:p>
-            <a:r>
-              <a:rPr lang="en-US" dirty="0"/>
-              <a:t/>
-            </a:r>
             <a:endParaRPr lang="en-US" dirty="0"/>
           </a:p>
         </p:txBody>
@@ -1301,10 +1046,6 @@
           <a:bodyPr/>
           <a:lstStyle/>
           <a:p>
-            <a:r>
-              <a:rPr lang="en-US" dirty="0"/>
-              <a:t/>
-            </a:r>
             <a:endParaRPr lang="en-US" dirty="0"/>
           </a:p>
         </p:txBody>
@@ -1378,6 +1119,11 @@
 <file path=ppt/slideMasters/slideMaster1.xml><?xml version="1.0" encoding="utf-8"?>
 <p:sldMaster xmlns:a="http://schemas.openxmlformats.org/drawingml/2006/main" xmlns:r="http://schemas.openxmlformats.org/officeDocument/2006/relationships" xmlns:p="http://schemas.openxmlformats.org/presentationml/2006/main">
   <p:cSld>
+    <p:bg>
+      <p:bgRef idx="1001">
+        <a:schemeClr val="bg1"/>
+      </p:bgRef>
+    </p:bg>
     <p:spTree>
       <p:nvGrpSpPr>
         <p:cNvPr id="1" name=""/>
@@ -1660,6 +1406,7 @@
         <a:solidFill>
           <a:srgbClr val="000924"/>
         </a:solidFill>
+        <a:effectLst/>
       </p:bgPr>
     </p:bg>
     <p:spTree>
@@ -1700,6 +1447,13 @@
             <a:prstDash val="solid"/>
           </a:ln>
         </p:spPr>
+        <p:txBody>
+          <a:bodyPr/>
+          <a:lstStyle/>
+          <a:p>
+            <a:endParaRPr lang="en-US"/>
+          </a:p>
+        </p:txBody>
       </p:sp>
       <p:sp>
         <p:nvSpPr>
@@ -1722,19 +1476,16 @@
           <a:bodyPr wrap="square" rtlCol="0" anchor="ctr"/>
           <a:lstStyle/>
           <a:p>
-            <a:pPr indent="0" marL="0">
-              <a:buNone/>
-            </a:pPr>
-            <a:r>
-              <a:rPr lang="en-US" sz="2600" i="1" dirty="0">
-                <a:solidFill>
-                  <a:srgbClr val="7B9FE0"/>
-                </a:solidFill>
-                <a:latin typeface="Calibri" pitchFamily="34" charset="0"/>
-                <a:ea typeface="Calibri" pitchFamily="34" charset="-122"/>
-                <a:cs typeface="Calibri" pitchFamily="34" charset="-120"/>
-              </a:rPr>
-              <a:t>Data bukan masalahnya.</a:t>
+            <a:r>
+              <a:rPr lang="en-US" sz="2800" kern="0" spc="100" dirty="0">
+                <a:solidFill>
+                  <a:srgbClr val="FFFFFF"/>
+                </a:solidFill>
+                <a:latin typeface="Calibri" pitchFamily="34" charset="0"/>
+                <a:ea typeface="Calibri" pitchFamily="34" charset="-122"/>
+                <a:cs typeface="Calibri" pitchFamily="34" charset="-120"/>
+              </a:rPr>
+              <a:t>Final Project</a:t>
             </a:r>
             <a:endParaRPr lang="en-US" sz="2600" dirty="0"/>
           </a:p>
@@ -1748,7 +1499,7 @@
         </p:nvSpPr>
         <p:spPr>
           <a:xfrm>
-            <a:off x="914400" y="1691640"/>
+            <a:off x="914399" y="1393421"/>
             <a:ext cx="7315200" cy="2286000"/>
           </a:xfrm>
           <a:prstGeom prst="rect">
@@ -1761,11 +1512,8 @@
           <a:bodyPr wrap="square" rtlCol="0" anchor="ctr"/>
           <a:lstStyle/>
           <a:p>
-            <a:pPr algn="l" indent="0" marL="0">
-              <a:buNone/>
-            </a:pPr>
-            <a:r>
-              <a:rPr lang="en-US" sz="5200" b="1" dirty="0">
+            <a:r>
+              <a:rPr lang="en-US" sz="5400" kern="0" spc="100" dirty="0">
                 <a:solidFill>
                   <a:srgbClr val="FFFFFF"/>
                 </a:solidFill>
@@ -1773,16 +1521,183 @@
                 <a:ea typeface="Calibri" pitchFamily="34" charset="-122"/>
                 <a:cs typeface="Calibri" pitchFamily="34" charset="-120"/>
               </a:rPr>
+              <a:t>AI-Powered Financial Performance Dashboard</a:t>
+            </a:r>
+            <a:endParaRPr lang="en-US" sz="5200" dirty="0"/>
+          </a:p>
+        </p:txBody>
+      </p:sp>
+      <p:sp>
+        <p:nvSpPr>
+          <p:cNvPr id="5" name="Text 3"/>
+          <p:cNvSpPr/>
+          <p:nvPr/>
+        </p:nvSpPr>
+        <p:spPr>
+          <a:xfrm>
+            <a:off x="914399" y="4462272"/>
+            <a:ext cx="6128747" cy="566928"/>
+          </a:xfrm>
+          <a:prstGeom prst="rect">
+            <a:avLst/>
+          </a:prstGeom>
+          <a:noFill/>
+          <a:ln/>
+        </p:spPr>
+        <p:txBody>
+          <a:bodyPr wrap="square" rtlCol="0" anchor="ctr"/>
+          <a:lstStyle/>
+          <a:p>
+            <a:r>
+              <a:rPr lang="en-US" sz="1400" b="1" i="1" dirty="0">
+                <a:solidFill>
+                  <a:schemeClr val="bg1"/>
+                </a:solidFill>
+                <a:ea typeface="Calibri" pitchFamily="34" charset="-122"/>
+                <a:cs typeface="Calibri" pitchFamily="34" charset="-120"/>
+              </a:rPr>
+              <a:t>Data </a:t>
+            </a:r>
+            <a:r>
+              <a:rPr lang="en-US" sz="1400" b="1" i="1" dirty="0" err="1">
+                <a:solidFill>
+                  <a:schemeClr val="bg1"/>
+                </a:solidFill>
+                <a:ea typeface="Calibri" pitchFamily="34" charset="-122"/>
+                <a:cs typeface="Calibri" pitchFamily="34" charset="-120"/>
+              </a:rPr>
+              <a:t>bukan</a:t>
+            </a:r>
+            <a:r>
+              <a:rPr lang="en-US" sz="1400" b="1" i="1" dirty="0">
+                <a:solidFill>
+                  <a:schemeClr val="bg1"/>
+                </a:solidFill>
+                <a:ea typeface="Calibri" pitchFamily="34" charset="-122"/>
+                <a:cs typeface="Calibri" pitchFamily="34" charset="-120"/>
+              </a:rPr>
+              <a:t> </a:t>
+            </a:r>
+            <a:r>
+              <a:rPr lang="en-US" sz="1400" b="1" i="1" dirty="0" err="1">
+                <a:solidFill>
+                  <a:schemeClr val="bg1"/>
+                </a:solidFill>
+                <a:ea typeface="Calibri" pitchFamily="34" charset="-122"/>
+                <a:cs typeface="Calibri" pitchFamily="34" charset="-120"/>
+              </a:rPr>
+              <a:t>masalahnya</a:t>
+            </a:r>
+            <a:r>
+              <a:rPr lang="en-US" sz="1400" b="1" i="1" dirty="0">
+                <a:solidFill>
+                  <a:schemeClr val="bg1"/>
+                </a:solidFill>
+                <a:ea typeface="Calibri" pitchFamily="34" charset="-122"/>
+                <a:cs typeface="Calibri" pitchFamily="34" charset="-120"/>
+              </a:rPr>
+              <a:t>. </a:t>
+            </a:r>
+            <a:r>
+              <a:rPr lang="en-US" sz="1400" b="1" dirty="0">
+                <a:solidFill>
+                  <a:schemeClr val="bg1"/>
+                </a:solidFill>
+                <a:ea typeface="Calibri" pitchFamily="34" charset="-122"/>
+                <a:cs typeface="Calibri" pitchFamily="34" charset="-120"/>
+              </a:rPr>
               <a:t>Keputusan</a:t>
             </a:r>
-            <a:endParaRPr lang="en-US" sz="5200" dirty="0"/>
-          </a:p>
-          <a:p>
-            <a:pPr algn="l" indent="0" marL="0">
-              <a:buNone/>
-            </a:pPr>
-            <a:r>
-              <a:rPr lang="en-US" sz="5200" b="1" dirty="0">
+            <a:r>
+              <a:rPr lang="en-US" sz="1400" b="1" dirty="0">
+                <a:solidFill>
+                  <a:schemeClr val="bg1"/>
+                </a:solidFill>
+              </a:rPr>
+              <a:t> </a:t>
+            </a:r>
+            <a:r>
+              <a:rPr lang="en-US" sz="1400" b="1" dirty="0">
+                <a:solidFill>
+                  <a:schemeClr val="bg1"/>
+                </a:solidFill>
+                <a:ea typeface="Calibri" pitchFamily="34" charset="-122"/>
+                <a:cs typeface="Calibri" pitchFamily="34" charset="-120"/>
+              </a:rPr>
+              <a:t>yang </a:t>
+            </a:r>
+            <a:r>
+              <a:rPr lang="en-US" sz="1400" b="1" dirty="0" err="1">
+                <a:solidFill>
+                  <a:schemeClr val="bg1"/>
+                </a:solidFill>
+                <a:ea typeface="Calibri" pitchFamily="34" charset="-122"/>
+                <a:cs typeface="Calibri" pitchFamily="34" charset="-120"/>
+              </a:rPr>
+              <a:t>terlambat</a:t>
+            </a:r>
+            <a:r>
+              <a:rPr lang="en-US" sz="1400" b="1" dirty="0">
+                <a:solidFill>
+                  <a:schemeClr val="bg1"/>
+                </a:solidFill>
+              </a:rPr>
+              <a:t> </a:t>
+            </a:r>
+            <a:r>
+              <a:rPr lang="en-US" sz="1400" b="1" dirty="0" err="1">
+                <a:solidFill>
+                  <a:schemeClr val="bg1"/>
+                </a:solidFill>
+                <a:ea typeface="Calibri" pitchFamily="34" charset="-122"/>
+                <a:cs typeface="Calibri" pitchFamily="34" charset="-120"/>
+              </a:rPr>
+              <a:t>masalahnya</a:t>
+            </a:r>
+            <a:r>
+              <a:rPr lang="en-US" sz="1400" b="1" dirty="0">
+                <a:solidFill>
+                  <a:schemeClr val="bg1"/>
+                </a:solidFill>
+                <a:ea typeface="Calibri" pitchFamily="34" charset="-122"/>
+                <a:cs typeface="Calibri" pitchFamily="34" charset="-120"/>
+              </a:rPr>
+              <a:t>.</a:t>
+            </a:r>
+            <a:endParaRPr lang="en-US" sz="1400" b="1" dirty="0">
+              <a:solidFill>
+                <a:schemeClr val="bg1"/>
+              </a:solidFill>
+            </a:endParaRPr>
+          </a:p>
+        </p:txBody>
+      </p:sp>
+      <p:sp>
+        <p:nvSpPr>
+          <p:cNvPr id="6" name="Text 4"/>
+          <p:cNvSpPr/>
+          <p:nvPr/>
+        </p:nvSpPr>
+        <p:spPr>
+          <a:xfrm>
+            <a:off x="5165227" y="3301608"/>
+            <a:ext cx="2926080" cy="566928"/>
+          </a:xfrm>
+          <a:prstGeom prst="rect">
+            <a:avLst/>
+          </a:prstGeom>
+          <a:noFill/>
+          <a:ln/>
+        </p:spPr>
+        <p:txBody>
+          <a:bodyPr wrap="square" rtlCol="0" anchor="ctr"/>
+          <a:lstStyle/>
+          <a:p>
+            <a:pPr marL="0" indent="0" algn="r">
+              <a:buNone/>
+            </a:pPr>
+            <a:r>
+              <a:rPr lang="en-US" b="1" kern="0" spc="100" dirty="0">
                 <a:solidFill>
                   <a:srgbClr val="FFFFFF"/>
                 </a:solidFill>
@@ -1790,104 +1705,9 @@
                 <a:ea typeface="Calibri" pitchFamily="34" charset="-122"/>
                 <a:cs typeface="Calibri" pitchFamily="34" charset="-120"/>
               </a:rPr>
-              <a:t>yang terlambat</a:t>
-            </a:r>
-            <a:endParaRPr lang="en-US" sz="5200" dirty="0"/>
-          </a:p>
-          <a:p>
-            <a:pPr algn="l" indent="0" marL="0">
-              <a:buNone/>
-            </a:pPr>
-            <a:r>
-              <a:rPr lang="en-US" sz="5200" b="1" dirty="0">
-                <a:solidFill>
-                  <a:srgbClr val="FFFFFF"/>
-                </a:solidFill>
-                <a:latin typeface="Calibri" pitchFamily="34" charset="0"/>
-                <a:ea typeface="Calibri" pitchFamily="34" charset="-122"/>
-                <a:cs typeface="Calibri" pitchFamily="34" charset="-120"/>
-              </a:rPr>
-              <a:t>masalahnya.</a:t>
-            </a:r>
-            <a:endParaRPr lang="en-US" sz="5200" dirty="0"/>
-          </a:p>
-        </p:txBody>
-      </p:sp>
-      <p:sp>
-        <p:nvSpPr>
-          <p:cNvPr id="5" name="Text 3"/>
-          <p:cNvSpPr/>
-          <p:nvPr/>
-        </p:nvSpPr>
-        <p:spPr>
-          <a:xfrm>
-            <a:off x="914400" y="4462272"/>
-            <a:ext cx="5029200" cy="566928"/>
-          </a:xfrm>
-          <a:prstGeom prst="rect">
-            <a:avLst/>
-          </a:prstGeom>
-          <a:noFill/>
-          <a:ln/>
-        </p:spPr>
-        <p:txBody>
-          <a:bodyPr wrap="square" rtlCol="0" anchor="ctr"/>
-          <a:lstStyle/>
-          <a:p>
-            <a:pPr indent="0" marL="0">
-              <a:buNone/>
-            </a:pPr>
-            <a:r>
-              <a:rPr lang="en-US" sz="1100" spc="100" kern="0" dirty="0">
-                <a:solidFill>
-                  <a:srgbClr val="FFFFFF"/>
-                </a:solidFill>
-                <a:latin typeface="Calibri" pitchFamily="34" charset="0"/>
-                <a:ea typeface="Calibri" pitchFamily="34" charset="-122"/>
-                <a:cs typeface="Calibri" pitchFamily="34" charset="-120"/>
-              </a:rPr>
-              <a:t>AI-Powered Financial Performance Dashboard  ·  Final Project</a:t>
-            </a:r>
-            <a:endParaRPr lang="en-US" sz="1100" dirty="0"/>
-          </a:p>
-        </p:txBody>
-      </p:sp>
-      <p:sp>
-        <p:nvSpPr>
-          <p:cNvPr id="6" name="Text 4"/>
-          <p:cNvSpPr/>
-          <p:nvPr/>
-        </p:nvSpPr>
-        <p:spPr>
-          <a:xfrm>
-            <a:off x="5943600" y="4462272"/>
-            <a:ext cx="2926080" cy="566928"/>
-          </a:xfrm>
-          <a:prstGeom prst="rect">
-            <a:avLst/>
-          </a:prstGeom>
-          <a:noFill/>
-          <a:ln/>
-        </p:spPr>
-        <p:txBody>
-          <a:bodyPr wrap="square" rtlCol="0" anchor="ctr"/>
-          <a:lstStyle/>
-          <a:p>
-            <a:pPr algn="r" indent="0" marL="0">
-              <a:buNone/>
-            </a:pPr>
-            <a:r>
-              <a:rPr lang="en-US" sz="1100" b="1" spc="100" kern="0" dirty="0">
-                <a:solidFill>
-                  <a:srgbClr val="FFFFFF"/>
-                </a:solidFill>
-                <a:latin typeface="Calibri" pitchFamily="34" charset="0"/>
-                <a:ea typeface="Calibri" pitchFamily="34" charset="-122"/>
-                <a:cs typeface="Calibri" pitchFamily="34" charset="-120"/>
-              </a:rPr>
               <a:t>by  BAYU ISTANTORO</a:t>
             </a:r>
-            <a:endParaRPr lang="en-US" sz="1100" dirty="0"/>
+            <a:endParaRPr lang="en-US" dirty="0"/>
           </a:p>
         </p:txBody>
       </p:sp>
@@ -1907,6 +1727,7 @@
         <a:solidFill>
           <a:srgbClr val="000924"/>
         </a:solidFill>
+        <a:effectLst/>
       </p:bgPr>
     </p:bg>
     <p:spTree>
@@ -1947,6 +1768,13 @@
             <a:prstDash val="solid"/>
           </a:ln>
         </p:spPr>
+        <p:txBody>
+          <a:bodyPr/>
+          <a:lstStyle/>
+          <a:p>
+            <a:endParaRPr lang="en-US"/>
+          </a:p>
+        </p:txBody>
       </p:sp>
       <p:sp>
         <p:nvSpPr>
@@ -1969,7 +1797,7 @@
           <a:bodyPr wrap="square" rtlCol="0" anchor="ctr"/>
           <a:lstStyle/>
           <a:p>
-            <a:pPr indent="0" marL="0">
+            <a:pPr marL="0" indent="0">
               <a:buNone/>
             </a:pPr>
             <a:r>
@@ -1986,7 +1814,7 @@
             <a:endParaRPr lang="en-US" sz="3400" dirty="0"/>
           </a:p>
           <a:p>
-            <a:pPr indent="0" marL="0">
+            <a:pPr marL="0" indent="0">
               <a:buNone/>
             </a:pPr>
             <a:r>
@@ -2003,7 +1831,7 @@
             <a:endParaRPr lang="en-US" sz="3400" dirty="0"/>
           </a:p>
           <a:p>
-            <a:pPr indent="0" marL="0">
+            <a:pPr marL="0" indent="0">
               <a:buNone/>
             </a:pPr>
             <a:r>
@@ -2042,7 +1870,7 @@
           <a:bodyPr wrap="square" rtlCol="0" anchor="ctr"/>
           <a:lstStyle/>
           <a:p>
-            <a:pPr indent="0" marL="0">
+            <a:pPr marL="0" indent="0">
               <a:buNone/>
             </a:pPr>
             <a:r>
@@ -2059,7 +1887,7 @@
             <a:endParaRPr lang="en-US" sz="4000" dirty="0"/>
           </a:p>
           <a:p>
-            <a:pPr indent="0" marL="0">
+            <a:pPr marL="0" indent="0">
               <a:buNone/>
             </a:pPr>
             <a:r>
@@ -2098,11 +1926,11 @@
           <a:bodyPr wrap="square" rtlCol="0" anchor="ctr"/>
           <a:lstStyle/>
           <a:p>
-            <a:pPr indent="0" marL="0">
-              <a:buNone/>
-            </a:pPr>
-            <a:r>
-              <a:rPr lang="en-US" sz="1100" spc="100" kern="0" dirty="0">
+            <a:pPr marL="0" indent="0">
+              <a:buNone/>
+            </a:pPr>
+            <a:r>
+              <a:rPr lang="en-US" sz="1100" kern="0" spc="100" dirty="0">
                 <a:solidFill>
                   <a:srgbClr val="FFFFFF"/>
                 </a:solidFill>
@@ -2137,7 +1965,7 @@
           <a:bodyPr wrap="square" rtlCol="0" anchor="ctr"/>
           <a:lstStyle/>
           <a:p>
-            <a:pPr algn="r" indent="0" marL="0">
+            <a:pPr marL="0" indent="0" algn="r">
               <a:buNone/>
             </a:pPr>
             <a:r>
@@ -2154,7 +1982,7 @@
             <a:endParaRPr lang="en-US" sz="1000" dirty="0"/>
           </a:p>
           <a:p>
-            <a:pPr algn="r" indent="0" marL="0">
+            <a:pPr marL="0" indent="0" algn="r">
               <a:buNone/>
             </a:pPr>
             <a:r>
@@ -2188,6 +2016,7 @@
         <a:solidFill>
           <a:srgbClr val="FFFFFF"/>
         </a:solidFill>
+        <a:effectLst/>
       </p:bgPr>
     </p:bg>
     <p:spTree>
@@ -2225,7 +2054,7 @@
           <a:bodyPr wrap="square" rtlCol="0" anchor="ctr"/>
           <a:lstStyle/>
           <a:p>
-            <a:pPr indent="0" marL="0">
+            <a:pPr marL="0" indent="0">
               <a:buNone/>
             </a:pPr>
             <a:r>
@@ -2242,7 +2071,7 @@
             <a:endParaRPr lang="en-US" sz="3800" dirty="0"/>
           </a:p>
           <a:p>
-            <a:pPr indent="0" marL="0">
+            <a:pPr marL="0" indent="0">
               <a:buNone/>
             </a:pPr>
             <a:r>
@@ -2284,6 +2113,13 @@
             <a:prstDash val="solid"/>
           </a:ln>
         </p:spPr>
+        <p:txBody>
+          <a:bodyPr/>
+          <a:lstStyle/>
+          <a:p>
+            <a:endParaRPr lang="en-US"/>
+          </a:p>
+        </p:txBody>
       </p:sp>
       <p:sp>
         <p:nvSpPr>
@@ -2306,7 +2142,7 @@
           <a:bodyPr wrap="square" rtlCol="0" anchor="ctr"/>
           <a:lstStyle/>
           <a:p>
-            <a:pPr algn="ctr" indent="0" marL="0">
+            <a:pPr marL="0" indent="0" algn="ctr">
               <a:buNone/>
             </a:pPr>
             <a:r>
@@ -2345,7 +2181,7 @@
           <a:bodyPr wrap="square" rtlCol="0" anchor="ctr"/>
           <a:lstStyle/>
           <a:p>
-            <a:pPr indent="0" marL="0">
+            <a:pPr marL="0" indent="0">
               <a:buNone/>
             </a:pPr>
             <a:r>
@@ -2384,7 +2220,7 @@
           <a:bodyPr wrap="square" rtlCol="0" anchor="ctr"/>
           <a:lstStyle/>
           <a:p>
-            <a:pPr indent="0" marL="0">
+            <a:pPr marL="0" indent="0">
               <a:buNone/>
             </a:pPr>
             <a:r>
@@ -2426,6 +2262,13 @@
             <a:prstDash val="solid"/>
           </a:ln>
         </p:spPr>
+        <p:txBody>
+          <a:bodyPr/>
+          <a:lstStyle/>
+          <a:p>
+            <a:endParaRPr lang="en-US"/>
+          </a:p>
+        </p:txBody>
       </p:sp>
       <p:sp>
         <p:nvSpPr>
@@ -2448,7 +2291,7 @@
           <a:bodyPr wrap="square" rtlCol="0" anchor="ctr"/>
           <a:lstStyle/>
           <a:p>
-            <a:pPr algn="ctr" indent="0" marL="0">
+            <a:pPr marL="0" indent="0" algn="ctr">
               <a:buNone/>
             </a:pPr>
             <a:r>
@@ -2487,7 +2330,7 @@
           <a:bodyPr wrap="square" rtlCol="0" anchor="ctr"/>
           <a:lstStyle/>
           <a:p>
-            <a:pPr indent="0" marL="0">
+            <a:pPr marL="0" indent="0">
               <a:buNone/>
             </a:pPr>
             <a:r>
@@ -2526,7 +2369,7 @@
           <a:bodyPr wrap="square" rtlCol="0" anchor="ctr"/>
           <a:lstStyle/>
           <a:p>
-            <a:pPr indent="0" marL="0">
+            <a:pPr marL="0" indent="0">
               <a:buNone/>
             </a:pPr>
             <a:r>
@@ -2568,6 +2411,13 @@
             <a:prstDash val="solid"/>
           </a:ln>
         </p:spPr>
+        <p:txBody>
+          <a:bodyPr/>
+          <a:lstStyle/>
+          <a:p>
+            <a:endParaRPr lang="en-US"/>
+          </a:p>
+        </p:txBody>
       </p:sp>
       <p:sp>
         <p:nvSpPr>
@@ -2590,7 +2440,7 @@
           <a:bodyPr wrap="square" rtlCol="0" anchor="ctr"/>
           <a:lstStyle/>
           <a:p>
-            <a:pPr algn="ctr" indent="0" marL="0">
+            <a:pPr marL="0" indent="0" algn="ctr">
               <a:buNone/>
             </a:pPr>
             <a:r>
@@ -2629,7 +2479,7 @@
           <a:bodyPr wrap="square" rtlCol="0" anchor="ctr"/>
           <a:lstStyle/>
           <a:p>
-            <a:pPr indent="0" marL="0">
+            <a:pPr marL="0" indent="0">
               <a:buNone/>
             </a:pPr>
             <a:r>
@@ -2668,7 +2518,7 @@
           <a:bodyPr wrap="square" rtlCol="0" anchor="ctr"/>
           <a:lstStyle/>
           <a:p>
-            <a:pPr indent="0" marL="0">
+            <a:pPr marL="0" indent="0">
               <a:buNone/>
             </a:pPr>
             <a:r>
@@ -2710,6 +2560,13 @@
             <a:prstDash val="solid"/>
           </a:ln>
         </p:spPr>
+        <p:txBody>
+          <a:bodyPr/>
+          <a:lstStyle/>
+          <a:p>
+            <a:endParaRPr lang="en-US"/>
+          </a:p>
+        </p:txBody>
       </p:sp>
       <p:sp>
         <p:nvSpPr>
@@ -2732,7 +2589,7 @@
           <a:bodyPr wrap="square" rtlCol="0" anchor="ctr"/>
           <a:lstStyle/>
           <a:p>
-            <a:pPr algn="ctr" indent="0" marL="0">
+            <a:pPr marL="0" indent="0" algn="ctr">
               <a:buNone/>
             </a:pPr>
             <a:r>
@@ -2771,7 +2628,7 @@
           <a:bodyPr wrap="square" rtlCol="0" anchor="ctr"/>
           <a:lstStyle/>
           <a:p>
-            <a:pPr indent="0" marL="0">
+            <a:pPr marL="0" indent="0">
               <a:buNone/>
             </a:pPr>
             <a:r>
@@ -2810,7 +2667,7 @@
           <a:bodyPr wrap="square" rtlCol="0" anchor="ctr"/>
           <a:lstStyle/>
           <a:p>
-            <a:pPr indent="0" marL="0">
+            <a:pPr marL="0" indent="0">
               <a:buNone/>
             </a:pPr>
             <a:r>
@@ -2852,6 +2709,13 @@
             <a:prstDash val="solid"/>
           </a:ln>
         </p:spPr>
+        <p:txBody>
+          <a:bodyPr/>
+          <a:lstStyle/>
+          <a:p>
+            <a:endParaRPr lang="en-US"/>
+          </a:p>
+        </p:txBody>
       </p:sp>
       <p:sp>
         <p:nvSpPr>
@@ -2874,7 +2738,7 @@
           <a:bodyPr wrap="square" rtlCol="0" anchor="ctr"/>
           <a:lstStyle/>
           <a:p>
-            <a:pPr indent="0" marL="0">
+            <a:pPr marL="0" indent="0">
               <a:buNone/>
             </a:pPr>
             <a:r>
@@ -2908,6 +2772,7 @@
         <a:solidFill>
           <a:srgbClr val="000924"/>
         </a:solidFill>
+        <a:effectLst/>
       </p:bgPr>
     </p:bg>
     <p:spTree>
@@ -2945,7 +2810,7 @@
           <a:bodyPr wrap="square" rtlCol="0" anchor="ctr"/>
           <a:lstStyle/>
           <a:p>
-            <a:pPr indent="0" marL="0">
+            <a:pPr marL="0" indent="0">
               <a:buNone/>
             </a:pPr>
             <a:r>
@@ -2962,7 +2827,7 @@
             <a:endParaRPr lang="en-US" sz="4000" dirty="0"/>
           </a:p>
           <a:p>
-            <a:pPr indent="0" marL="0">
+            <a:pPr marL="0" indent="0">
               <a:buNone/>
             </a:pPr>
             <a:r>
@@ -3001,7 +2866,7 @@
           <a:bodyPr wrap="square" rtlCol="0" anchor="ctr"/>
           <a:lstStyle/>
           <a:p>
-            <a:pPr indent="0" marL="0">
+            <a:pPr marL="0" indent="0">
               <a:buNone/>
             </a:pPr>
             <a:r>
@@ -3018,7 +2883,7 @@
             <a:endParaRPr lang="en-US" sz="3600" dirty="0"/>
           </a:p>
           <a:p>
-            <a:pPr indent="0" marL="0">
+            <a:pPr marL="0" indent="0">
               <a:buNone/>
             </a:pPr>
             <a:r>
@@ -3035,7 +2900,7 @@
             <a:endParaRPr lang="en-US" sz="3600" dirty="0"/>
           </a:p>
           <a:p>
-            <a:pPr indent="0" marL="0">
+            <a:pPr marL="0" indent="0">
               <a:buNone/>
             </a:pPr>
             <a:r>
@@ -3077,6 +2942,13 @@
             <a:prstDash val="solid"/>
           </a:ln>
         </p:spPr>
+        <p:txBody>
+          <a:bodyPr/>
+          <a:lstStyle/>
+          <a:p>
+            <a:endParaRPr lang="en-US"/>
+          </a:p>
+        </p:txBody>
       </p:sp>
     </p:spTree>
   </p:cSld>
@@ -3094,6 +2966,7 @@
         <a:solidFill>
           <a:srgbClr val="F8F9FC"/>
         </a:solidFill>
+        <a:effectLst/>
       </p:bgPr>
     </p:bg>
     <p:spTree>
@@ -3134,6 +3007,13 @@
             <a:prstDash val="solid"/>
           </a:ln>
         </p:spPr>
+        <p:txBody>
+          <a:bodyPr/>
+          <a:lstStyle/>
+          <a:p>
+            <a:endParaRPr lang="en-US"/>
+          </a:p>
+        </p:txBody>
       </p:sp>
       <p:sp>
         <p:nvSpPr>
@@ -3156,7 +3036,7 @@
           <a:bodyPr wrap="square" rtlCol="0" anchor="ctr"/>
           <a:lstStyle/>
           <a:p>
-            <a:pPr indent="0" marL="0">
+            <a:pPr marL="0" indent="0">
               <a:buNone/>
             </a:pPr>
             <a:r>
@@ -3195,7 +3075,7 @@
           <a:bodyPr wrap="square" rtlCol="0" anchor="ctr"/>
           <a:lstStyle/>
           <a:p>
-            <a:pPr indent="0" marL="0">
+            <a:pPr marL="0" indent="0">
               <a:buNone/>
             </a:pPr>
             <a:r>
@@ -3212,7 +3092,7 @@
             <a:endParaRPr lang="en-US" sz="4000" dirty="0"/>
           </a:p>
           <a:p>
-            <a:pPr indent="0" marL="0">
+            <a:pPr marL="0" indent="0">
               <a:buNone/>
             </a:pPr>
             <a:r>
@@ -3254,6 +3134,13 @@
             <a:prstDash val="solid"/>
           </a:ln>
         </p:spPr>
+        <p:txBody>
+          <a:bodyPr/>
+          <a:lstStyle/>
+          <a:p>
+            <a:endParaRPr lang="en-US"/>
+          </a:p>
+        </p:txBody>
       </p:sp>
       <p:sp>
         <p:nvSpPr>
@@ -3276,7 +3163,7 @@
           <a:bodyPr wrap="square" rtlCol="0" anchor="ctr"/>
           <a:lstStyle/>
           <a:p>
-            <a:pPr algn="ctr" indent="0" marL="0">
+            <a:pPr marL="0" indent="0" algn="ctr">
               <a:buNone/>
             </a:pPr>
             <a:r>
@@ -3312,7 +3199,7 @@
           <a:bodyPr wrap="square" rtlCol="0" anchor="ctr"/>
           <a:lstStyle/>
           <a:p>
-            <a:pPr algn="ctr" indent="0" marL="0">
+            <a:pPr marL="0" indent="0" algn="ctr">
               <a:buNone/>
             </a:pPr>
             <a:r>
@@ -3329,7 +3216,7 @@
             <a:endParaRPr lang="en-US" sz="1200" dirty="0"/>
           </a:p>
           <a:p>
-            <a:pPr algn="ctr" indent="0" marL="0">
+            <a:pPr marL="0" indent="0" algn="ctr">
               <a:buNone/>
             </a:pPr>
             <a:r>
@@ -3368,7 +3255,7 @@
           <a:bodyPr wrap="square" rtlCol="0" anchor="ctr"/>
           <a:lstStyle/>
           <a:p>
-            <a:pPr algn="ctr" indent="0" marL="0">
+            <a:pPr marL="0" indent="0" algn="ctr">
               <a:buNone/>
             </a:pPr>
             <a:r>
@@ -3404,7 +3291,7 @@
           <a:bodyPr wrap="square" rtlCol="0" anchor="ctr"/>
           <a:lstStyle/>
           <a:p>
-            <a:pPr algn="ctr" indent="0" marL="0">
+            <a:pPr marL="0" indent="0" algn="ctr">
               <a:buNone/>
             </a:pPr>
             <a:r>
@@ -3421,7 +3308,7 @@
             <a:endParaRPr lang="en-US" sz="1200" dirty="0"/>
           </a:p>
           <a:p>
-            <a:pPr algn="ctr" indent="0" marL="0">
+            <a:pPr marL="0" indent="0" algn="ctr">
               <a:buNone/>
             </a:pPr>
             <a:r>
@@ -3460,7 +3347,7 @@
           <a:bodyPr wrap="square" rtlCol="0" anchor="ctr"/>
           <a:lstStyle/>
           <a:p>
-            <a:pPr algn="ctr" indent="0" marL="0">
+            <a:pPr marL="0" indent="0" algn="ctr">
               <a:buNone/>
             </a:pPr>
             <a:r>
@@ -3496,7 +3383,7 @@
           <a:bodyPr wrap="square" rtlCol="0" anchor="ctr"/>
           <a:lstStyle/>
           <a:p>
-            <a:pPr algn="ctr" indent="0" marL="0">
+            <a:pPr marL="0" indent="0" algn="ctr">
               <a:buNone/>
             </a:pPr>
             <a:r>
@@ -3513,7 +3400,7 @@
             <a:endParaRPr lang="en-US" sz="1200" dirty="0"/>
           </a:p>
           <a:p>
-            <a:pPr algn="ctr" indent="0" marL="0">
+            <a:pPr marL="0" indent="0" algn="ctr">
               <a:buNone/>
             </a:pPr>
             <a:r>
@@ -3552,7 +3439,7 @@
           <a:bodyPr wrap="square" rtlCol="0" anchor="ctr"/>
           <a:lstStyle/>
           <a:p>
-            <a:pPr algn="ctr" indent="0" marL="0">
+            <a:pPr marL="0" indent="0" algn="ctr">
               <a:buNone/>
             </a:pPr>
             <a:r>
@@ -3588,7 +3475,7 @@
           <a:bodyPr wrap="square" rtlCol="0" anchor="ctr"/>
           <a:lstStyle/>
           <a:p>
-            <a:pPr algn="ctr" indent="0" marL="0">
+            <a:pPr marL="0" indent="0" algn="ctr">
               <a:buNone/>
             </a:pPr>
             <a:r>
@@ -3605,7 +3492,7 @@
             <a:endParaRPr lang="en-US" sz="1200" dirty="0"/>
           </a:p>
           <a:p>
-            <a:pPr algn="ctr" indent="0" marL="0">
+            <a:pPr marL="0" indent="0" algn="ctr">
               <a:buNone/>
             </a:pPr>
             <a:r>
@@ -3644,11 +3531,11 @@
           <a:bodyPr wrap="square" rtlCol="0" anchor="ctr"/>
           <a:lstStyle/>
           <a:p>
-            <a:pPr algn="ctr" indent="0" marL="0">
-              <a:buNone/>
-            </a:pPr>
-            <a:r>
-              <a:rPr lang="en-US" sz="1000" spc="100" kern="0" dirty="0">
+            <a:pPr marL="0" indent="0" algn="ctr">
+              <a:buNone/>
+            </a:pPr>
+            <a:r>
+              <a:rPr lang="en-US" sz="1000" kern="0" spc="100" dirty="0">
                 <a:solidFill>
                   <a:srgbClr val="64748B"/>
                 </a:solidFill>
@@ -3678,6 +3565,7 @@
         <a:solidFill>
           <a:srgbClr val="FFFFFF"/>
         </a:solidFill>
+        <a:effectLst/>
       </p:bgPr>
     </p:bg>
     <p:spTree>
@@ -3715,7 +3603,7 @@
           <a:bodyPr wrap="square" rtlCol="0" anchor="ctr"/>
           <a:lstStyle/>
           <a:p>
-            <a:pPr indent="0" marL="0">
+            <a:pPr marL="0" indent="0">
               <a:buNone/>
             </a:pPr>
             <a:r>
@@ -3732,7 +3620,7 @@
             <a:endParaRPr lang="en-US" sz="3800" dirty="0"/>
           </a:p>
           <a:p>
-            <a:pPr indent="0" marL="0">
+            <a:pPr marL="0" indent="0">
               <a:buNone/>
             </a:pPr>
             <a:r>
@@ -3774,6 +3662,13 @@
             <a:prstDash val="solid"/>
           </a:ln>
         </p:spPr>
+        <p:txBody>
+          <a:bodyPr/>
+          <a:lstStyle/>
+          <a:p>
+            <a:endParaRPr lang="en-US"/>
+          </a:p>
+        </p:txBody>
       </p:sp>
       <p:sp>
         <p:nvSpPr>
@@ -3796,7 +3691,7 @@
           <a:bodyPr wrap="square" rtlCol="0" anchor="ctr"/>
           <a:lstStyle/>
           <a:p>
-            <a:pPr algn="ctr" indent="0" marL="0">
+            <a:pPr marL="0" indent="0" algn="ctr">
               <a:buNone/>
             </a:pPr>
             <a:r>
@@ -3838,6 +3733,13 @@
             <a:prstDash val="solid"/>
           </a:ln>
         </p:spPr>
+        <p:txBody>
+          <a:bodyPr/>
+          <a:lstStyle/>
+          <a:p>
+            <a:endParaRPr lang="en-US"/>
+          </a:p>
+        </p:txBody>
       </p:sp>
       <p:sp>
         <p:nvSpPr>
@@ -3860,7 +3762,7 @@
           <a:bodyPr wrap="square" rtlCol="0" anchor="ctr"/>
           <a:lstStyle/>
           <a:p>
-            <a:pPr algn="ctr" indent="0" marL="0">
+            <a:pPr marL="0" indent="0" algn="ctr">
               <a:buNone/>
             </a:pPr>
             <a:r>
@@ -3899,7 +3801,7 @@
           <a:bodyPr wrap="square" rtlCol="0" anchor="ctr"/>
           <a:lstStyle/>
           <a:p>
-            <a:pPr algn="ctr" indent="0" marL="0">
+            <a:pPr marL="0" indent="0" algn="ctr">
               <a:buNone/>
             </a:pPr>
             <a:r>
@@ -3941,6 +3843,13 @@
             <a:prstDash val="solid"/>
           </a:ln>
         </p:spPr>
+        <p:txBody>
+          <a:bodyPr/>
+          <a:lstStyle/>
+          <a:p>
+            <a:endParaRPr lang="en-US"/>
+          </a:p>
+        </p:txBody>
       </p:sp>
       <p:sp>
         <p:nvSpPr>
@@ -3963,7 +3872,7 @@
           <a:bodyPr wrap="square" rtlCol="0" anchor="ctr"/>
           <a:lstStyle/>
           <a:p>
-            <a:pPr algn="ctr" indent="0" marL="0">
+            <a:pPr marL="0" indent="0" algn="ctr">
               <a:buNone/>
             </a:pPr>
             <a:r>
@@ -4005,6 +3914,13 @@
             <a:prstDash val="solid"/>
           </a:ln>
         </p:spPr>
+        <p:txBody>
+          <a:bodyPr/>
+          <a:lstStyle/>
+          <a:p>
+            <a:endParaRPr lang="en-US"/>
+          </a:p>
+        </p:txBody>
       </p:sp>
       <p:sp>
         <p:nvSpPr>
@@ -4027,7 +3943,7 @@
           <a:bodyPr wrap="square" rtlCol="0" anchor="ctr"/>
           <a:lstStyle/>
           <a:p>
-            <a:pPr algn="ctr" indent="0" marL="0">
+            <a:pPr marL="0" indent="0" algn="ctr">
               <a:buNone/>
             </a:pPr>
             <a:r>
@@ -4066,7 +3982,7 @@
           <a:bodyPr wrap="square" rtlCol="0" anchor="ctr"/>
           <a:lstStyle/>
           <a:p>
-            <a:pPr algn="ctr" indent="0" marL="0">
+            <a:pPr marL="0" indent="0" algn="ctr">
               <a:buNone/>
             </a:pPr>
             <a:r>
@@ -4108,6 +4024,13 @@
             <a:prstDash val="solid"/>
           </a:ln>
         </p:spPr>
+        <p:txBody>
+          <a:bodyPr/>
+          <a:lstStyle/>
+          <a:p>
+            <a:endParaRPr lang="en-US"/>
+          </a:p>
+        </p:txBody>
       </p:sp>
       <p:sp>
         <p:nvSpPr>
@@ -4130,7 +4053,7 @@
           <a:bodyPr wrap="square" rtlCol="0" anchor="ctr"/>
           <a:lstStyle/>
           <a:p>
-            <a:pPr algn="ctr" indent="0" marL="0">
+            <a:pPr marL="0" indent="0" algn="ctr">
               <a:buNone/>
             </a:pPr>
             <a:r>
@@ -4172,6 +4095,13 @@
             <a:prstDash val="solid"/>
           </a:ln>
         </p:spPr>
+        <p:txBody>
+          <a:bodyPr/>
+          <a:lstStyle/>
+          <a:p>
+            <a:endParaRPr lang="en-US"/>
+          </a:p>
+        </p:txBody>
       </p:sp>
       <p:sp>
         <p:nvSpPr>
@@ -4194,7 +4124,7 @@
           <a:bodyPr wrap="square" rtlCol="0" anchor="ctr"/>
           <a:lstStyle/>
           <a:p>
-            <a:pPr algn="ctr" indent="0" marL="0">
+            <a:pPr marL="0" indent="0" algn="ctr">
               <a:buNone/>
             </a:pPr>
             <a:r>
@@ -4233,7 +4163,7 @@
           <a:bodyPr wrap="square" rtlCol="0" anchor="ctr"/>
           <a:lstStyle/>
           <a:p>
-            <a:pPr algn="ctr" indent="0" marL="0">
+            <a:pPr marL="0" indent="0" algn="ctr">
               <a:buNone/>
             </a:pPr>
             <a:r>
@@ -4275,6 +4205,13 @@
             <a:prstDash val="solid"/>
           </a:ln>
         </p:spPr>
+        <p:txBody>
+          <a:bodyPr/>
+          <a:lstStyle/>
+          <a:p>
+            <a:endParaRPr lang="en-US"/>
+          </a:p>
+        </p:txBody>
       </p:sp>
       <p:sp>
         <p:nvSpPr>
@@ -4297,7 +4234,7 @@
           <a:bodyPr wrap="square" rtlCol="0" anchor="ctr"/>
           <a:lstStyle/>
           <a:p>
-            <a:pPr algn="ctr" indent="0" marL="0">
+            <a:pPr marL="0" indent="0" algn="ctr">
               <a:buNone/>
             </a:pPr>
             <a:r>
@@ -4339,6 +4276,13 @@
             <a:prstDash val="solid"/>
           </a:ln>
         </p:spPr>
+        <p:txBody>
+          <a:bodyPr/>
+          <a:lstStyle/>
+          <a:p>
+            <a:endParaRPr lang="en-US"/>
+          </a:p>
+        </p:txBody>
       </p:sp>
       <p:sp>
         <p:nvSpPr>
@@ -4361,7 +4305,7 @@
           <a:bodyPr wrap="square" rtlCol="0" anchor="ctr"/>
           <a:lstStyle/>
           <a:p>
-            <a:pPr algn="ctr" indent="0" marL="0">
+            <a:pPr marL="0" indent="0" algn="ctr">
               <a:buNone/>
             </a:pPr>
             <a:r>
@@ -4400,7 +4344,7 @@
           <a:bodyPr wrap="square" rtlCol="0" anchor="ctr"/>
           <a:lstStyle/>
           <a:p>
-            <a:pPr algn="ctr" indent="0" marL="0">
+            <a:pPr marL="0" indent="0" algn="ctr">
               <a:buNone/>
             </a:pPr>
             <a:r>
@@ -4442,6 +4386,13 @@
             <a:prstDash val="solid"/>
           </a:ln>
         </p:spPr>
+        <p:txBody>
+          <a:bodyPr/>
+          <a:lstStyle/>
+          <a:p>
+            <a:endParaRPr lang="en-US"/>
+          </a:p>
+        </p:txBody>
       </p:sp>
       <p:sp>
         <p:nvSpPr>
@@ -4464,7 +4415,7 @@
           <a:bodyPr wrap="square" rtlCol="0" anchor="ctr"/>
           <a:lstStyle/>
           <a:p>
-            <a:pPr algn="ctr" indent="0" marL="0">
+            <a:pPr marL="0" indent="0" algn="ctr">
               <a:buNone/>
             </a:pPr>
             <a:r>
@@ -4503,7 +4454,7 @@
           <a:bodyPr wrap="square" rtlCol="0" anchor="ctr"/>
           <a:lstStyle/>
           <a:p>
-            <a:pPr algn="ctr" indent="0" marL="0">
+            <a:pPr marL="0" indent="0" algn="ctr">
               <a:buNone/>
             </a:pPr>
             <a:r>
@@ -4542,7 +4493,7 @@
           <a:bodyPr wrap="square" rtlCol="0" anchor="ctr"/>
           <a:lstStyle/>
           <a:p>
-            <a:pPr algn="ctr" indent="0" marL="0">
+            <a:pPr marL="0" indent="0" algn="ctr">
               <a:buNone/>
             </a:pPr>
             <a:r>
@@ -4584,6 +4535,13 @@
             <a:prstDash val="solid"/>
           </a:ln>
         </p:spPr>
+        <p:txBody>
+          <a:bodyPr/>
+          <a:lstStyle/>
+          <a:p>
+            <a:endParaRPr lang="en-US"/>
+          </a:p>
+        </p:txBody>
       </p:sp>
       <p:sp>
         <p:nvSpPr>
@@ -4606,7 +4564,7 @@
           <a:bodyPr wrap="square" rtlCol="0" anchor="ctr"/>
           <a:lstStyle/>
           <a:p>
-            <a:pPr algn="ctr" indent="0" marL="0">
+            <a:pPr marL="0" indent="0" algn="ctr">
               <a:buNone/>
             </a:pPr>
             <a:r>
@@ -4640,6 +4598,7 @@
         <a:solidFill>
           <a:srgbClr val="F8F9FC"/>
         </a:solidFill>
+        <a:effectLst/>
       </p:bgPr>
     </p:bg>
     <p:spTree>
@@ -4680,6 +4639,13 @@
             <a:prstDash val="solid"/>
           </a:ln>
         </p:spPr>
+        <p:txBody>
+          <a:bodyPr/>
+          <a:lstStyle/>
+          <a:p>
+            <a:endParaRPr lang="en-US"/>
+          </a:p>
+        </p:txBody>
       </p:sp>
       <p:sp>
         <p:nvSpPr>
@@ -4702,7 +4668,7 @@
           <a:bodyPr wrap="square" rtlCol="0" anchor="ctr"/>
           <a:lstStyle/>
           <a:p>
-            <a:pPr indent="0" marL="0">
+            <a:pPr marL="0" indent="0">
               <a:buNone/>
             </a:pPr>
             <a:r>
@@ -4744,13 +4710,20 @@
             <a:prstDash val="solid"/>
           </a:ln>
           <a:effectLst>
-            <a:outerShdw sx="100000" sy="100000" kx="0" ky="0" algn="bl" rotWithShape="0" blurRad="101600" dist="38100" dir="8100000">
+            <a:outerShdw blurRad="101600" dist="38100" dir="8100000" algn="bl" rotWithShape="0">
               <a:srgbClr val="000924">
                 <a:alpha val="10000"/>
               </a:srgbClr>
             </a:outerShdw>
           </a:effectLst>
         </p:spPr>
+        <p:txBody>
+          <a:bodyPr/>
+          <a:lstStyle/>
+          <a:p>
+            <a:endParaRPr lang="en-US"/>
+          </a:p>
+        </p:txBody>
       </p:sp>
       <p:sp>
         <p:nvSpPr>
@@ -4776,6 +4749,13 @@
             <a:prstDash val="solid"/>
           </a:ln>
         </p:spPr>
+        <p:txBody>
+          <a:bodyPr/>
+          <a:lstStyle/>
+          <a:p>
+            <a:endParaRPr lang="en-US"/>
+          </a:p>
+        </p:txBody>
       </p:sp>
       <p:sp>
         <p:nvSpPr>
@@ -4798,7 +4778,7 @@
           <a:bodyPr wrap="square" rtlCol="0" anchor="ctr"/>
           <a:lstStyle/>
           <a:p>
-            <a:pPr indent="0" marL="0">
+            <a:pPr marL="0" indent="0">
               <a:buNone/>
             </a:pPr>
             <a:r>
@@ -4837,7 +4817,7 @@
           <a:bodyPr wrap="square" rtlCol="0" anchor="ctr"/>
           <a:lstStyle/>
           <a:p>
-            <a:pPr indent="0" marL="0">
+            <a:pPr marL="0" indent="0">
               <a:buNone/>
             </a:pPr>
             <a:r>
@@ -4879,13 +4859,20 @@
             <a:prstDash val="solid"/>
           </a:ln>
           <a:effectLst>
-            <a:outerShdw sx="100000" sy="100000" kx="0" ky="0" algn="bl" rotWithShape="0" blurRad="101600" dist="38100" dir="8100000">
+            <a:outerShdw blurRad="101600" dist="38100" dir="8100000" algn="bl" rotWithShape="0">
               <a:srgbClr val="000924">
                 <a:alpha val="10000"/>
               </a:srgbClr>
             </a:outerShdw>
           </a:effectLst>
         </p:spPr>
+        <p:txBody>
+          <a:bodyPr/>
+          <a:lstStyle/>
+          <a:p>
+            <a:endParaRPr lang="en-US"/>
+          </a:p>
+        </p:txBody>
       </p:sp>
       <p:sp>
         <p:nvSpPr>
@@ -4911,6 +4898,13 @@
             <a:prstDash val="solid"/>
           </a:ln>
         </p:spPr>
+        <p:txBody>
+          <a:bodyPr/>
+          <a:lstStyle/>
+          <a:p>
+            <a:endParaRPr lang="en-US"/>
+          </a:p>
+        </p:txBody>
       </p:sp>
       <p:sp>
         <p:nvSpPr>
@@ -4933,7 +4927,7 @@
           <a:bodyPr wrap="square" rtlCol="0" anchor="ctr"/>
           <a:lstStyle/>
           <a:p>
-            <a:pPr indent="0" marL="0">
+            <a:pPr marL="0" indent="0">
               <a:buNone/>
             </a:pPr>
             <a:r>
@@ -4972,7 +4966,7 @@
           <a:bodyPr wrap="square" rtlCol="0" anchor="ctr"/>
           <a:lstStyle/>
           <a:p>
-            <a:pPr indent="0" marL="0">
+            <a:pPr marL="0" indent="0">
               <a:buNone/>
             </a:pPr>
             <a:r>
@@ -5014,13 +5008,20 @@
             <a:prstDash val="solid"/>
           </a:ln>
           <a:effectLst>
-            <a:outerShdw sx="100000" sy="100000" kx="0" ky="0" algn="bl" rotWithShape="0" blurRad="101600" dist="38100" dir="8100000">
+            <a:outerShdw blurRad="101600" dist="38100" dir="8100000" algn="bl" rotWithShape="0">
               <a:srgbClr val="000924">
                 <a:alpha val="10000"/>
               </a:srgbClr>
             </a:outerShdw>
           </a:effectLst>
         </p:spPr>
+        <p:txBody>
+          <a:bodyPr/>
+          <a:lstStyle/>
+          <a:p>
+            <a:endParaRPr lang="en-US"/>
+          </a:p>
+        </p:txBody>
       </p:sp>
       <p:sp>
         <p:nvSpPr>
@@ -5046,6 +5047,13 @@
             <a:prstDash val="solid"/>
           </a:ln>
         </p:spPr>
+        <p:txBody>
+          <a:bodyPr/>
+          <a:lstStyle/>
+          <a:p>
+            <a:endParaRPr lang="en-US"/>
+          </a:p>
+        </p:txBody>
       </p:sp>
       <p:sp>
         <p:nvSpPr>
@@ -5068,7 +5076,7 @@
           <a:bodyPr wrap="square" rtlCol="0" anchor="ctr"/>
           <a:lstStyle/>
           <a:p>
-            <a:pPr indent="0" marL="0">
+            <a:pPr marL="0" indent="0">
               <a:buNone/>
             </a:pPr>
             <a:r>
@@ -5080,7 +5088,7 @@
                 <a:ea typeface="Calibri" pitchFamily="34" charset="-122"/>
                 <a:cs typeface="Calibri" pitchFamily="34" charset="-120"/>
               </a:rPr>
-              <a:t>⚖️  7 Rasio Keuangan</a:t>
+              <a:t>⚖️  Rasio Keuangan</a:t>
             </a:r>
             <a:endParaRPr lang="en-US" sz="1300" dirty="0"/>
           </a:p>
@@ -5107,7 +5115,7 @@
           <a:bodyPr wrap="square" rtlCol="0" anchor="ctr"/>
           <a:lstStyle/>
           <a:p>
-            <a:pPr indent="0" marL="0">
+            <a:pPr marL="0" indent="0">
               <a:buNone/>
             </a:pPr>
             <a:r>
@@ -5149,13 +5157,20 @@
             <a:prstDash val="solid"/>
           </a:ln>
           <a:effectLst>
-            <a:outerShdw sx="100000" sy="100000" kx="0" ky="0" algn="bl" rotWithShape="0" blurRad="101600" dist="38100" dir="8100000">
+            <a:outerShdw blurRad="101600" dist="38100" dir="8100000" algn="bl" rotWithShape="0">
               <a:srgbClr val="000924">
                 <a:alpha val="10000"/>
               </a:srgbClr>
             </a:outerShdw>
           </a:effectLst>
         </p:spPr>
+        <p:txBody>
+          <a:bodyPr/>
+          <a:lstStyle/>
+          <a:p>
+            <a:endParaRPr lang="en-US"/>
+          </a:p>
+        </p:txBody>
       </p:sp>
       <p:sp>
         <p:nvSpPr>
@@ -5181,6 +5196,13 @@
             <a:prstDash val="solid"/>
           </a:ln>
         </p:spPr>
+        <p:txBody>
+          <a:bodyPr/>
+          <a:lstStyle/>
+          <a:p>
+            <a:endParaRPr lang="en-US"/>
+          </a:p>
+        </p:txBody>
       </p:sp>
       <p:sp>
         <p:nvSpPr>
@@ -5203,7 +5225,7 @@
           <a:bodyPr wrap="square" rtlCol="0" anchor="ctr"/>
           <a:lstStyle/>
           <a:p>
-            <a:pPr indent="0" marL="0">
+            <a:pPr marL="0" indent="0">
               <a:buNone/>
             </a:pPr>
             <a:r>
@@ -5242,7 +5264,7 @@
           <a:bodyPr wrap="square" rtlCol="0" anchor="ctr"/>
           <a:lstStyle/>
           <a:p>
-            <a:pPr indent="0" marL="0">
+            <a:pPr marL="0" indent="0">
               <a:buNone/>
             </a:pPr>
             <a:r>
@@ -5284,13 +5306,20 @@
             <a:prstDash val="solid"/>
           </a:ln>
           <a:effectLst>
-            <a:outerShdw sx="100000" sy="100000" kx="0" ky="0" algn="bl" rotWithShape="0" blurRad="101600" dist="38100" dir="8100000">
+            <a:outerShdw blurRad="101600" dist="38100" dir="8100000" algn="bl" rotWithShape="0">
               <a:srgbClr val="000924">
                 <a:alpha val="10000"/>
               </a:srgbClr>
             </a:outerShdw>
           </a:effectLst>
         </p:spPr>
+        <p:txBody>
+          <a:bodyPr/>
+          <a:lstStyle/>
+          <a:p>
+            <a:endParaRPr lang="en-US"/>
+          </a:p>
+        </p:txBody>
       </p:sp>
       <p:sp>
         <p:nvSpPr>
@@ -5316,6 +5345,13 @@
             <a:prstDash val="solid"/>
           </a:ln>
         </p:spPr>
+        <p:txBody>
+          <a:bodyPr/>
+          <a:lstStyle/>
+          <a:p>
+            <a:endParaRPr lang="en-US"/>
+          </a:p>
+        </p:txBody>
       </p:sp>
       <p:sp>
         <p:nvSpPr>
@@ -5338,7 +5374,7 @@
           <a:bodyPr wrap="square" rtlCol="0" anchor="ctr"/>
           <a:lstStyle/>
           <a:p>
-            <a:pPr indent="0" marL="0">
+            <a:pPr marL="0" indent="0">
               <a:buNone/>
             </a:pPr>
             <a:r>
@@ -5377,7 +5413,7 @@
           <a:bodyPr wrap="square" rtlCol="0" anchor="ctr"/>
           <a:lstStyle/>
           <a:p>
-            <a:pPr indent="0" marL="0">
+            <a:pPr marL="0" indent="0">
               <a:buNone/>
             </a:pPr>
             <a:r>
@@ -5419,13 +5455,20 @@
             <a:prstDash val="solid"/>
           </a:ln>
           <a:effectLst>
-            <a:outerShdw sx="100000" sy="100000" kx="0" ky="0" algn="bl" rotWithShape="0" blurRad="101600" dist="38100" dir="8100000">
+            <a:outerShdw blurRad="101600" dist="38100" dir="8100000" algn="bl" rotWithShape="0">
               <a:srgbClr val="000924">
                 <a:alpha val="10000"/>
               </a:srgbClr>
             </a:outerShdw>
           </a:effectLst>
         </p:spPr>
+        <p:txBody>
+          <a:bodyPr/>
+          <a:lstStyle/>
+          <a:p>
+            <a:endParaRPr lang="en-US"/>
+          </a:p>
+        </p:txBody>
       </p:sp>
       <p:sp>
         <p:nvSpPr>
@@ -5451,6 +5494,13 @@
             <a:prstDash val="solid"/>
           </a:ln>
         </p:spPr>
+        <p:txBody>
+          <a:bodyPr/>
+          <a:lstStyle/>
+          <a:p>
+            <a:endParaRPr lang="en-US"/>
+          </a:p>
+        </p:txBody>
       </p:sp>
       <p:sp>
         <p:nvSpPr>
@@ -5473,7 +5523,7 @@
           <a:bodyPr wrap="square" rtlCol="0" anchor="ctr"/>
           <a:lstStyle/>
           <a:p>
-            <a:pPr indent="0" marL="0">
+            <a:pPr marL="0" indent="0">
               <a:buNone/>
             </a:pPr>
             <a:r>
@@ -5512,7 +5562,7 @@
           <a:bodyPr wrap="square" rtlCol="0" anchor="ctr"/>
           <a:lstStyle/>
           <a:p>
-            <a:pPr indent="0" marL="0">
+            <a:pPr marL="0" indent="0">
               <a:buNone/>
             </a:pPr>
             <a:r>
@@ -5546,6 +5596,7 @@
         <a:solidFill>
           <a:srgbClr val="FFFFFF"/>
         </a:solidFill>
+        <a:effectLst/>
       </p:bgPr>
     </p:bg>
     <p:spTree>
@@ -5583,7 +5634,7 @@
           <a:bodyPr wrap="square" rtlCol="0" anchor="ctr"/>
           <a:lstStyle/>
           <a:p>
-            <a:pPr indent="0" marL="0">
+            <a:pPr marL="0" indent="0">
               <a:buNone/>
             </a:pPr>
             <a:r>
@@ -5625,13 +5676,20 @@
             <a:prstDash val="solid"/>
           </a:ln>
           <a:effectLst>
-            <a:outerShdw sx="100000" sy="100000" kx="0" ky="0" algn="bl" rotWithShape="0" blurRad="101600" dist="38100" dir="8100000">
+            <a:outerShdw blurRad="101600" dist="38100" dir="8100000" algn="bl" rotWithShape="0">
               <a:srgbClr val="000924">
                 <a:alpha val="10000"/>
               </a:srgbClr>
             </a:outerShdw>
           </a:effectLst>
         </p:spPr>
+        <p:txBody>
+          <a:bodyPr/>
+          <a:lstStyle/>
+          <a:p>
+            <a:endParaRPr lang="en-US"/>
+          </a:p>
+        </p:txBody>
       </p:sp>
       <p:sp>
         <p:nvSpPr>
@@ -5657,6 +5715,13 @@
             <a:prstDash val="solid"/>
           </a:ln>
         </p:spPr>
+        <p:txBody>
+          <a:bodyPr/>
+          <a:lstStyle/>
+          <a:p>
+            <a:endParaRPr lang="en-US"/>
+          </a:p>
+        </p:txBody>
       </p:sp>
       <p:sp>
         <p:nvSpPr>
@@ -5679,7 +5744,7 @@
           <a:bodyPr wrap="square" rtlCol="0" anchor="ctr"/>
           <a:lstStyle/>
           <a:p>
-            <a:pPr indent="0" marL="0">
+            <a:pPr marL="0" indent="0">
               <a:buNone/>
             </a:pPr>
             <a:r>
@@ -5718,7 +5783,7 @@
           <a:bodyPr wrap="square" rtlCol="0" anchor="ctr"/>
           <a:lstStyle/>
           <a:p>
-            <a:pPr indent="0" marL="0">
+            <a:pPr marL="0" indent="0">
               <a:buNone/>
             </a:pPr>
             <a:r>
@@ -5757,7 +5822,7 @@
           <a:bodyPr wrap="square" rtlCol="0" anchor="ctr"/>
           <a:lstStyle/>
           <a:p>
-            <a:pPr indent="0" marL="0">
+            <a:pPr marL="0" indent="0">
               <a:buNone/>
             </a:pPr>
             <a:r>
@@ -5796,7 +5861,7 @@
           <a:bodyPr wrap="square" rtlCol="0" anchor="ctr"/>
           <a:lstStyle/>
           <a:p>
-            <a:pPr indent="0" marL="0">
+            <a:pPr marL="0" indent="0">
               <a:buNone/>
             </a:pPr>
             <a:r>
@@ -5835,7 +5900,7 @@
           <a:bodyPr wrap="square" rtlCol="0" anchor="ctr"/>
           <a:lstStyle/>
           <a:p>
-            <a:pPr indent="0" marL="0">
+            <a:pPr marL="0" indent="0">
               <a:buNone/>
             </a:pPr>
             <a:r>
@@ -5877,13 +5942,20 @@
             <a:prstDash val="solid"/>
           </a:ln>
           <a:effectLst>
-            <a:outerShdw sx="100000" sy="100000" kx="0" ky="0" algn="bl" rotWithShape="0" blurRad="101600" dist="38100" dir="8100000">
+            <a:outerShdw blurRad="101600" dist="38100" dir="8100000" algn="bl" rotWithShape="0">
               <a:srgbClr val="000924">
                 <a:alpha val="10000"/>
               </a:srgbClr>
             </a:outerShdw>
           </a:effectLst>
         </p:spPr>
+        <p:txBody>
+          <a:bodyPr/>
+          <a:lstStyle/>
+          <a:p>
+            <a:endParaRPr lang="en-US"/>
+          </a:p>
+        </p:txBody>
       </p:sp>
       <p:sp>
         <p:nvSpPr>
@@ -5909,6 +5981,13 @@
             <a:prstDash val="solid"/>
           </a:ln>
         </p:spPr>
+        <p:txBody>
+          <a:bodyPr/>
+          <a:lstStyle/>
+          <a:p>
+            <a:endParaRPr lang="en-US"/>
+          </a:p>
+        </p:txBody>
       </p:sp>
       <p:sp>
         <p:nvSpPr>
@@ -5931,7 +6010,7 @@
           <a:bodyPr wrap="square" rtlCol="0" anchor="ctr"/>
           <a:lstStyle/>
           <a:p>
-            <a:pPr indent="0" marL="0">
+            <a:pPr marL="0" indent="0">
               <a:buNone/>
             </a:pPr>
             <a:r>
@@ -5970,7 +6049,7 @@
           <a:bodyPr wrap="square" rtlCol="0" anchor="ctr"/>
           <a:lstStyle/>
           <a:p>
-            <a:pPr indent="0" marL="0">
+            <a:pPr marL="0" indent="0">
               <a:buNone/>
             </a:pPr>
             <a:r>
@@ -6009,7 +6088,7 @@
           <a:bodyPr wrap="square" rtlCol="0" anchor="ctr"/>
           <a:lstStyle/>
           <a:p>
-            <a:pPr indent="0" marL="0">
+            <a:pPr marL="0" indent="0">
               <a:buNone/>
             </a:pPr>
             <a:r>
@@ -6048,7 +6127,7 @@
           <a:bodyPr wrap="square" rtlCol="0" anchor="ctr"/>
           <a:lstStyle/>
           <a:p>
-            <a:pPr indent="0" marL="0">
+            <a:pPr marL="0" indent="0">
               <a:buNone/>
             </a:pPr>
             <a:r>
@@ -6087,7 +6166,7 @@
           <a:bodyPr wrap="square" rtlCol="0" anchor="ctr"/>
           <a:lstStyle/>
           <a:p>
-            <a:pPr indent="0" marL="0">
+            <a:pPr marL="0" indent="0">
               <a:buNone/>
             </a:pPr>
             <a:r>
@@ -6129,13 +6208,20 @@
             <a:prstDash val="solid"/>
           </a:ln>
           <a:effectLst>
-            <a:outerShdw sx="100000" sy="100000" kx="0" ky="0" algn="bl" rotWithShape="0" blurRad="101600" dist="38100" dir="8100000">
+            <a:outerShdw blurRad="101600" dist="38100" dir="8100000" algn="bl" rotWithShape="0">
               <a:srgbClr val="000924">
                 <a:alpha val="10000"/>
               </a:srgbClr>
             </a:outerShdw>
           </a:effectLst>
         </p:spPr>
+        <p:txBody>
+          <a:bodyPr/>
+          <a:lstStyle/>
+          <a:p>
+            <a:endParaRPr lang="en-US"/>
+          </a:p>
+        </p:txBody>
       </p:sp>
       <p:sp>
         <p:nvSpPr>
@@ -6161,6 +6247,13 @@
             <a:prstDash val="solid"/>
           </a:ln>
         </p:spPr>
+        <p:txBody>
+          <a:bodyPr/>
+          <a:lstStyle/>
+          <a:p>
+            <a:endParaRPr lang="en-US"/>
+          </a:p>
+        </p:txBody>
       </p:sp>
       <p:sp>
         <p:nvSpPr>
@@ -6183,7 +6276,7 @@
           <a:bodyPr wrap="square" rtlCol="0" anchor="ctr"/>
           <a:lstStyle/>
           <a:p>
-            <a:pPr indent="0" marL="0">
+            <a:pPr marL="0" indent="0">
               <a:buNone/>
             </a:pPr>
             <a:r>
@@ -6222,7 +6315,7 @@
           <a:bodyPr wrap="square" rtlCol="0" anchor="ctr"/>
           <a:lstStyle/>
           <a:p>
-            <a:pPr indent="0" marL="0">
+            <a:pPr marL="0" indent="0">
               <a:buNone/>
             </a:pPr>
             <a:r>
@@ -6261,7 +6354,7 @@
           <a:bodyPr wrap="square" rtlCol="0" anchor="ctr"/>
           <a:lstStyle/>
           <a:p>
-            <a:pPr indent="0" marL="0">
+            <a:pPr marL="0" indent="0">
               <a:buNone/>
             </a:pPr>
             <a:r>
@@ -6300,7 +6393,7 @@
           <a:bodyPr wrap="square" rtlCol="0" anchor="ctr"/>
           <a:lstStyle/>
           <a:p>
-            <a:pPr indent="0" marL="0">
+            <a:pPr marL="0" indent="0">
               <a:buNone/>
             </a:pPr>
             <a:r>
@@ -6339,7 +6432,7 @@
           <a:bodyPr wrap="square" rtlCol="0" anchor="ctr"/>
           <a:lstStyle/>
           <a:p>
-            <a:pPr indent="0" marL="0">
+            <a:pPr marL="0" indent="0">
               <a:buNone/>
             </a:pPr>
             <a:r>
@@ -6373,6 +6466,7 @@
         <a:solidFill>
           <a:srgbClr val="FFFFFF"/>
         </a:solidFill>
+        <a:effectLst/>
       </p:bgPr>
     </p:bg>
     <p:spTree>
@@ -6410,7 +6504,7 @@
           <a:bodyPr wrap="square" rtlCol="0" anchor="ctr"/>
           <a:lstStyle/>
           <a:p>
-            <a:pPr indent="0" marL="0">
+            <a:pPr marL="0" indent="0">
               <a:buNone/>
             </a:pPr>
             <a:r>
@@ -6452,6 +6546,13 @@
             <a:prstDash val="solid"/>
           </a:ln>
         </p:spPr>
+        <p:txBody>
+          <a:bodyPr/>
+          <a:lstStyle/>
+          <a:p>
+            <a:endParaRPr lang="en-US"/>
+          </a:p>
+        </p:txBody>
       </p:sp>
       <p:sp>
         <p:nvSpPr>
@@ -6477,6 +6578,13 @@
             <a:prstDash val="solid"/>
           </a:ln>
         </p:spPr>
+        <p:txBody>
+          <a:bodyPr/>
+          <a:lstStyle/>
+          <a:p>
+            <a:endParaRPr lang="en-US"/>
+          </a:p>
+        </p:txBody>
       </p:sp>
       <p:sp>
         <p:nvSpPr>
@@ -6499,7 +6607,7 @@
           <a:bodyPr wrap="square" rtlCol="0" anchor="ctr"/>
           <a:lstStyle/>
           <a:p>
-            <a:pPr algn="ctr" indent="0" marL="0">
+            <a:pPr marL="0" indent="0" algn="ctr">
               <a:buNone/>
             </a:pPr>
             <a:r>
@@ -6541,13 +6649,20 @@
             <a:prstDash val="solid"/>
           </a:ln>
           <a:effectLst>
-            <a:outerShdw sx="100000" sy="100000" kx="0" ky="0" algn="bl" rotWithShape="0" blurRad="101600" dist="38100" dir="8100000">
+            <a:outerShdw blurRad="101600" dist="38100" dir="8100000" algn="bl" rotWithShape="0">
               <a:srgbClr val="000924">
                 <a:alpha val="10000"/>
               </a:srgbClr>
             </a:outerShdw>
           </a:effectLst>
         </p:spPr>
+        <p:txBody>
+          <a:bodyPr/>
+          <a:lstStyle/>
+          <a:p>
+            <a:endParaRPr lang="en-US"/>
+          </a:p>
+        </p:txBody>
       </p:sp>
       <p:sp>
         <p:nvSpPr>
@@ -6573,6 +6688,13 @@
             <a:prstDash val="solid"/>
           </a:ln>
         </p:spPr>
+        <p:txBody>
+          <a:bodyPr/>
+          <a:lstStyle/>
+          <a:p>
+            <a:endParaRPr lang="en-US"/>
+          </a:p>
+        </p:txBody>
       </p:sp>
       <p:sp>
         <p:nvSpPr>
@@ -6595,7 +6717,7 @@
           <a:bodyPr wrap="square" rtlCol="0" anchor="ctr"/>
           <a:lstStyle/>
           <a:p>
-            <a:pPr algn="ctr" indent="0" marL="0">
+            <a:pPr marL="0" indent="0" algn="ctr">
               <a:buNone/>
             </a:pPr>
             <a:r>
@@ -6634,7 +6756,7 @@
           <a:bodyPr wrap="square" rtlCol="0" anchor="ctr"/>
           <a:lstStyle/>
           <a:p>
-            <a:pPr indent="0" marL="0">
+            <a:pPr marL="0" indent="0">
               <a:buNone/>
             </a:pPr>
             <a:r>
@@ -6673,7 +6795,7 @@
           <a:bodyPr wrap="square" rtlCol="0" anchor="ctr"/>
           <a:lstStyle/>
           <a:p>
-            <a:pPr indent="0" marL="0">
+            <a:pPr marL="0" indent="0">
               <a:buNone/>
             </a:pPr>
             <a:r>
@@ -6712,7 +6834,7 @@
           <a:bodyPr wrap="square" rtlCol="0" anchor="ctr"/>
           <a:lstStyle/>
           <a:p>
-            <a:pPr indent="0" marL="0">
+            <a:pPr marL="0" indent="0">
               <a:buNone/>
             </a:pPr>
             <a:r>
@@ -6754,6 +6876,13 @@
             <a:prstDash val="solid"/>
           </a:ln>
         </p:spPr>
+        <p:txBody>
+          <a:bodyPr/>
+          <a:lstStyle/>
+          <a:p>
+            <a:endParaRPr lang="en-US"/>
+          </a:p>
+        </p:txBody>
       </p:sp>
       <p:sp>
         <p:nvSpPr>
@@ -6776,7 +6905,7 @@
           <a:bodyPr wrap="square" rtlCol="0" anchor="ctr"/>
           <a:lstStyle/>
           <a:p>
-            <a:pPr algn="ctr" indent="0" marL="0">
+            <a:pPr marL="0" indent="0" algn="ctr">
               <a:buNone/>
             </a:pPr>
             <a:r>
@@ -6818,13 +6947,20 @@
             <a:prstDash val="solid"/>
           </a:ln>
           <a:effectLst>
-            <a:outerShdw sx="100000" sy="100000" kx="0" ky="0" algn="bl" rotWithShape="0" blurRad="101600" dist="38100" dir="8100000">
+            <a:outerShdw blurRad="101600" dist="38100" dir="8100000" algn="bl" rotWithShape="0">
               <a:srgbClr val="000924">
                 <a:alpha val="10000"/>
               </a:srgbClr>
             </a:outerShdw>
           </a:effectLst>
         </p:spPr>
+        <p:txBody>
+          <a:bodyPr/>
+          <a:lstStyle/>
+          <a:p>
+            <a:endParaRPr lang="en-US"/>
+          </a:p>
+        </p:txBody>
       </p:sp>
       <p:sp>
         <p:nvSpPr>
@@ -6850,160 +6986,11 @@
             <a:prstDash val="solid"/>
           </a:ln>
         </p:spPr>
-      </p:sp>
-      <p:sp>
-        <p:nvSpPr>
-          <p:cNvPr id="16" name="Text 14"/>
-          <p:cNvSpPr/>
-          <p:nvPr/>
-        </p:nvSpPr>
-        <p:spPr>
-          <a:xfrm>
-            <a:off x="2231136" y="2084832"/>
-            <a:ext cx="1389888" cy="384048"/>
-          </a:xfrm>
-          <a:prstGeom prst="rect">
-            <a:avLst/>
-          </a:prstGeom>
-          <a:noFill/>
-          <a:ln/>
-        </p:spPr>
-        <p:txBody>
-          <a:bodyPr wrap="square" rtlCol="0" anchor="ctr"/>
-          <a:lstStyle/>
-          <a:p>
-            <a:pPr algn="ctr" indent="0" marL="0">
-              <a:buNone/>
-            </a:pPr>
-            <a:r>
-              <a:rPr lang="en-US" sz="1300" b="1" dirty="0">
-                <a:solidFill>
-                  <a:srgbClr val="1B1B1E"/>
-                </a:solidFill>
-                <a:latin typeface="Calibri" pitchFamily="34" charset="0"/>
-                <a:ea typeface="Calibri" pitchFamily="34" charset="-122"/>
-                <a:cs typeface="Calibri" pitchFamily="34" charset="-120"/>
-              </a:rPr>
-              <a:t>Backend</a:t>
-            </a:r>
-            <a:endParaRPr lang="en-US" sz="1300" dirty="0"/>
-          </a:p>
-        </p:txBody>
-      </p:sp>
-      <p:sp>
-        <p:nvSpPr>
-          <p:cNvPr id="17" name="Text 15"/>
-          <p:cNvSpPr/>
-          <p:nvPr/>
-        </p:nvSpPr>
-        <p:spPr>
-          <a:xfrm>
-            <a:off x="2231136" y="2578608"/>
-            <a:ext cx="1389888" cy="548640"/>
-          </a:xfrm>
-          <a:prstGeom prst="rect">
-            <a:avLst/>
-          </a:prstGeom>
-          <a:noFill/>
-          <a:ln/>
-        </p:spPr>
-        <p:txBody>
-          <a:bodyPr wrap="square" rtlCol="0" anchor="ctr"/>
-          <a:lstStyle/>
-          <a:p>
-            <a:pPr indent="0" marL="0">
-              <a:buNone/>
-            </a:pPr>
-            <a:r>
-              <a:rPr lang="en-US" sz="950" dirty="0">
-                <a:solidFill>
-                  <a:srgbClr val="64748B"/>
-                </a:solidFill>
-                <a:latin typeface="Calibri" pitchFamily="34" charset="0"/>
-                <a:ea typeface="Calibri" pitchFamily="34" charset="-122"/>
-                <a:cs typeface="Calibri" pitchFamily="34" charset="-120"/>
-              </a:rPr>
-              <a:t>· ERD &amp; schema</a:t>
-            </a:r>
-            <a:endParaRPr lang="en-US" sz="950" dirty="0"/>
-          </a:p>
-        </p:txBody>
-      </p:sp>
-      <p:sp>
-        <p:nvSpPr>
-          <p:cNvPr id="18" name="Text 16"/>
-          <p:cNvSpPr/>
-          <p:nvPr/>
-        </p:nvSpPr>
-        <p:spPr>
-          <a:xfrm>
-            <a:off x="2231136" y="3236976"/>
-            <a:ext cx="1389888" cy="548640"/>
-          </a:xfrm>
-          <a:prstGeom prst="rect">
-            <a:avLst/>
-          </a:prstGeom>
-          <a:noFill/>
-          <a:ln/>
-        </p:spPr>
-        <p:txBody>
-          <a:bodyPr wrap="square" rtlCol="0" anchor="ctr"/>
-          <a:lstStyle/>
-          <a:p>
-            <a:pPr indent="0" marL="0">
-              <a:buNone/>
-            </a:pPr>
-            <a:r>
-              <a:rPr lang="en-US" sz="950" dirty="0">
-                <a:solidFill>
-                  <a:srgbClr val="64748B"/>
-                </a:solidFill>
-                <a:latin typeface="Calibri" pitchFamily="34" charset="0"/>
-                <a:ea typeface="Calibri" pitchFamily="34" charset="-122"/>
-                <a:cs typeface="Calibri" pitchFamily="34" charset="-120"/>
-              </a:rPr>
-              <a:t>· API routes</a:t>
-            </a:r>
-            <a:endParaRPr lang="en-US" sz="950" dirty="0"/>
-          </a:p>
-        </p:txBody>
-      </p:sp>
-      <p:sp>
-        <p:nvSpPr>
-          <p:cNvPr id="19" name="Text 17"/>
-          <p:cNvSpPr/>
-          <p:nvPr/>
-        </p:nvSpPr>
-        <p:spPr>
-          <a:xfrm>
-            <a:off x="2231136" y="3895344"/>
-            <a:ext cx="1389888" cy="548640"/>
-          </a:xfrm>
-          <a:prstGeom prst="rect">
-            <a:avLst/>
-          </a:prstGeom>
-          <a:noFill/>
-          <a:ln/>
-        </p:spPr>
-        <p:txBody>
-          <a:bodyPr wrap="square" rtlCol="0" anchor="ctr"/>
-          <a:lstStyle/>
-          <a:p>
-            <a:pPr indent="0" marL="0">
-              <a:buNone/>
-            </a:pPr>
-            <a:r>
-              <a:rPr lang="en-US" sz="950" dirty="0">
-                <a:solidFill>
-                  <a:srgbClr val="64748B"/>
-                </a:solidFill>
-                <a:latin typeface="Calibri" pitchFamily="34" charset="0"/>
-                <a:ea typeface="Calibri" pitchFamily="34" charset="-122"/>
-                <a:cs typeface="Calibri" pitchFamily="34" charset="-120"/>
-              </a:rPr>
-              <a:t>· Koneksi ERP / data layer</a:t>
-            </a:r>
-            <a:endParaRPr lang="en-US" sz="950" dirty="0"/>
+        <p:txBody>
+          <a:bodyPr/>
+          <a:lstStyle/>
+          <a:p>
+            <a:endParaRPr lang="en-US"/>
           </a:p>
         </p:txBody>
       </p:sp>
@@ -7031,6 +7018,13 @@
             <a:prstDash val="solid"/>
           </a:ln>
         </p:spPr>
+        <p:txBody>
+          <a:bodyPr/>
+          <a:lstStyle/>
+          <a:p>
+            <a:endParaRPr lang="en-US"/>
+          </a:p>
+        </p:txBody>
       </p:sp>
       <p:sp>
         <p:nvSpPr>
@@ -7053,7 +7047,7 @@
           <a:bodyPr wrap="square" rtlCol="0" anchor="ctr"/>
           <a:lstStyle/>
           <a:p>
-            <a:pPr algn="ctr" indent="0" marL="0">
+            <a:pPr marL="0" indent="0" algn="ctr">
               <a:buNone/>
             </a:pPr>
             <a:r>
@@ -7095,13 +7089,20 @@
             <a:prstDash val="solid"/>
           </a:ln>
           <a:effectLst>
-            <a:outerShdw sx="100000" sy="100000" kx="0" ky="0" algn="bl" rotWithShape="0" blurRad="101600" dist="38100" dir="8100000">
+            <a:outerShdw blurRad="101600" dist="38100" dir="8100000" algn="bl" rotWithShape="0">
               <a:srgbClr val="000924">
                 <a:alpha val="10000"/>
               </a:srgbClr>
             </a:outerShdw>
           </a:effectLst>
         </p:spPr>
+        <p:txBody>
+          <a:bodyPr/>
+          <a:lstStyle/>
+          <a:p>
+            <a:endParaRPr lang="en-US"/>
+          </a:p>
+        </p:txBody>
       </p:sp>
       <p:sp>
         <p:nvSpPr>
@@ -7127,163 +7128,191 @@
             <a:prstDash val="solid"/>
           </a:ln>
         </p:spPr>
-      </p:sp>
-      <p:sp>
-        <p:nvSpPr>
-          <p:cNvPr id="24" name="Text 22"/>
-          <p:cNvSpPr/>
-          <p:nvPr/>
-        </p:nvSpPr>
-        <p:spPr>
-          <a:xfrm>
-            <a:off x="3913632" y="2084832"/>
-            <a:ext cx="1389888" cy="384048"/>
-          </a:xfrm>
-          <a:prstGeom prst="rect">
-            <a:avLst/>
-          </a:prstGeom>
-          <a:noFill/>
-          <a:ln/>
-        </p:spPr>
-        <p:txBody>
-          <a:bodyPr wrap="square" rtlCol="0" anchor="ctr"/>
-          <a:lstStyle/>
-          <a:p>
-            <a:pPr algn="ctr" indent="0" marL="0">
-              <a:buNone/>
-            </a:pPr>
-            <a:r>
-              <a:rPr lang="en-US" sz="1300" b="1" dirty="0">
-                <a:solidFill>
-                  <a:srgbClr val="1B1B1E"/>
-                </a:solidFill>
-                <a:latin typeface="Calibri" pitchFamily="34" charset="0"/>
-                <a:ea typeface="Calibri" pitchFamily="34" charset="-122"/>
-                <a:cs typeface="Calibri" pitchFamily="34" charset="-120"/>
-              </a:rPr>
-              <a:t>Frontend</a:t>
-            </a:r>
-            <a:endParaRPr lang="en-US" sz="1300" dirty="0"/>
-          </a:p>
-        </p:txBody>
-      </p:sp>
-      <p:sp>
-        <p:nvSpPr>
-          <p:cNvPr id="25" name="Text 23"/>
-          <p:cNvSpPr/>
-          <p:nvPr/>
-        </p:nvSpPr>
-        <p:spPr>
-          <a:xfrm>
-            <a:off x="3913632" y="2578608"/>
-            <a:ext cx="1389888" cy="548640"/>
-          </a:xfrm>
-          <a:prstGeom prst="rect">
-            <a:avLst/>
-          </a:prstGeom>
-          <a:noFill/>
-          <a:ln/>
-        </p:spPr>
-        <p:txBody>
-          <a:bodyPr wrap="square" rtlCol="0" anchor="ctr"/>
-          <a:lstStyle/>
-          <a:p>
-            <a:pPr indent="0" marL="0">
-              <a:buNone/>
-            </a:pPr>
-            <a:r>
-              <a:rPr lang="en-US" sz="950" dirty="0">
-                <a:solidFill>
-                  <a:srgbClr val="64748B"/>
-                </a:solidFill>
-                <a:latin typeface="Calibri" pitchFamily="34" charset="0"/>
-                <a:ea typeface="Calibri" pitchFamily="34" charset="-122"/>
-                <a:cs typeface="Calibri" pitchFamily="34" charset="-120"/>
-              </a:rPr>
-              <a:t>· Dashboard UI</a:t>
-            </a:r>
-            <a:endParaRPr lang="en-US" sz="950" dirty="0"/>
-          </a:p>
-        </p:txBody>
-      </p:sp>
-      <p:sp>
-        <p:nvSpPr>
-          <p:cNvPr id="26" name="Text 24"/>
-          <p:cNvSpPr/>
-          <p:nvPr/>
-        </p:nvSpPr>
-        <p:spPr>
-          <a:xfrm>
-            <a:off x="3913632" y="3236976"/>
-            <a:ext cx="1389888" cy="548640"/>
-          </a:xfrm>
-          <a:prstGeom prst="rect">
-            <a:avLst/>
-          </a:prstGeom>
-          <a:noFill/>
-          <a:ln/>
-        </p:spPr>
-        <p:txBody>
-          <a:bodyPr wrap="square" rtlCol="0" anchor="ctr"/>
-          <a:lstStyle/>
-          <a:p>
-            <a:pPr indent="0" marL="0">
-              <a:buNone/>
-            </a:pPr>
-            <a:r>
-              <a:rPr lang="en-US" sz="950" dirty="0">
-                <a:solidFill>
-                  <a:srgbClr val="64748B"/>
-                </a:solidFill>
-                <a:latin typeface="Calibri" pitchFamily="34" charset="0"/>
-                <a:ea typeface="Calibri" pitchFamily="34" charset="-122"/>
-                <a:cs typeface="Calibri" pitchFamily="34" charset="-120"/>
-              </a:rPr>
-              <a:t>· 5 tab view</a:t>
-            </a:r>
-            <a:endParaRPr lang="en-US" sz="950" dirty="0"/>
-          </a:p>
-        </p:txBody>
-      </p:sp>
-      <p:sp>
-        <p:nvSpPr>
-          <p:cNvPr id="27" name="Text 25"/>
-          <p:cNvSpPr/>
-          <p:nvPr/>
-        </p:nvSpPr>
-        <p:spPr>
-          <a:xfrm>
-            <a:off x="3913632" y="3895344"/>
-            <a:ext cx="1389888" cy="548640"/>
-          </a:xfrm>
-          <a:prstGeom prst="rect">
-            <a:avLst/>
-          </a:prstGeom>
-          <a:noFill/>
-          <a:ln/>
-        </p:spPr>
-        <p:txBody>
-          <a:bodyPr wrap="square" rtlCol="0" anchor="ctr"/>
-          <a:lstStyle/>
-          <a:p>
-            <a:pPr indent="0" marL="0">
-              <a:buNone/>
-            </a:pPr>
-            <a:r>
-              <a:rPr lang="en-US" sz="950" dirty="0">
-                <a:solidFill>
-                  <a:srgbClr val="64748B"/>
-                </a:solidFill>
-                <a:latin typeface="Calibri" pitchFamily="34" charset="0"/>
-                <a:ea typeface="Calibri" pitchFamily="34" charset="-122"/>
-                <a:cs typeface="Calibri" pitchFamily="34" charset="-120"/>
-              </a:rPr>
-              <a:t>· Drill-down modal</a:t>
-            </a:r>
-            <a:endParaRPr lang="en-US" sz="950" dirty="0"/>
-          </a:p>
-        </p:txBody>
-      </p:sp>
+        <p:txBody>
+          <a:bodyPr/>
+          <a:lstStyle/>
+          <a:p>
+            <a:endParaRPr lang="en-US"/>
+          </a:p>
+        </p:txBody>
+      </p:sp>
+      <p:grpSp>
+        <p:nvGrpSpPr>
+          <p:cNvPr id="45" name="Group 44">
+            <a:extLst>
+              <a:ext uri="{FF2B5EF4-FFF2-40B4-BE49-F238E27FC236}">
+                <a16:creationId xmlns:a16="http://schemas.microsoft.com/office/drawing/2014/main" id="{1708978E-9A4A-EE46-161A-4053DAE4546A}"/>
+              </a:ext>
+            </a:extLst>
+          </p:cNvPr>
+          <p:cNvGrpSpPr/>
+          <p:nvPr/>
+        </p:nvGrpSpPr>
+        <p:grpSpPr>
+          <a:xfrm>
+            <a:off x="2267712" y="2093976"/>
+            <a:ext cx="1389888" cy="2359152"/>
+            <a:chOff x="3913632" y="2084832"/>
+            <a:chExt cx="1389888" cy="2359152"/>
+          </a:xfrm>
+        </p:grpSpPr>
+        <p:sp>
+          <p:nvSpPr>
+            <p:cNvPr id="24" name="Text 22"/>
+            <p:cNvSpPr/>
+            <p:nvPr/>
+          </p:nvSpPr>
+          <p:spPr>
+            <a:xfrm>
+              <a:off x="3913632" y="2084832"/>
+              <a:ext cx="1389888" cy="384048"/>
+            </a:xfrm>
+            <a:prstGeom prst="rect">
+              <a:avLst/>
+            </a:prstGeom>
+            <a:noFill/>
+            <a:ln/>
+          </p:spPr>
+          <p:txBody>
+            <a:bodyPr wrap="square" rtlCol="0" anchor="ctr"/>
+            <a:lstStyle/>
+            <a:p>
+              <a:pPr marL="0" indent="0" algn="ctr">
+                <a:buNone/>
+              </a:pPr>
+              <a:r>
+                <a:rPr lang="en-US" sz="1300" b="1" dirty="0">
+                  <a:solidFill>
+                    <a:srgbClr val="1B1B1E"/>
+                  </a:solidFill>
+                  <a:latin typeface="Calibri" pitchFamily="34" charset="0"/>
+                  <a:ea typeface="Calibri" pitchFamily="34" charset="-122"/>
+                  <a:cs typeface="Calibri" pitchFamily="34" charset="-120"/>
+                </a:rPr>
+                <a:t>Frontend</a:t>
+              </a:r>
+              <a:endParaRPr lang="en-US" sz="1300" dirty="0"/>
+            </a:p>
+          </p:txBody>
+        </p:sp>
+        <p:sp>
+          <p:nvSpPr>
+            <p:cNvPr id="25" name="Text 23"/>
+            <p:cNvSpPr/>
+            <p:nvPr/>
+          </p:nvSpPr>
+          <p:spPr>
+            <a:xfrm>
+              <a:off x="3913632" y="2578608"/>
+              <a:ext cx="1389888" cy="548640"/>
+            </a:xfrm>
+            <a:prstGeom prst="rect">
+              <a:avLst/>
+            </a:prstGeom>
+            <a:noFill/>
+            <a:ln/>
+          </p:spPr>
+          <p:txBody>
+            <a:bodyPr wrap="square" rtlCol="0" anchor="ctr"/>
+            <a:lstStyle/>
+            <a:p>
+              <a:pPr marL="0" indent="0">
+                <a:buNone/>
+              </a:pPr>
+              <a:r>
+                <a:rPr lang="en-US" sz="950" dirty="0">
+                  <a:solidFill>
+                    <a:srgbClr val="64748B"/>
+                  </a:solidFill>
+                  <a:latin typeface="Calibri" pitchFamily="34" charset="0"/>
+                  <a:ea typeface="Calibri" pitchFamily="34" charset="-122"/>
+                  <a:cs typeface="Calibri" pitchFamily="34" charset="-120"/>
+                </a:rPr>
+                <a:t>· Dashboard UI</a:t>
+              </a:r>
+              <a:endParaRPr lang="en-US" sz="950" dirty="0"/>
+            </a:p>
+          </p:txBody>
+        </p:sp>
+        <p:sp>
+          <p:nvSpPr>
+            <p:cNvPr id="26" name="Text 24"/>
+            <p:cNvSpPr/>
+            <p:nvPr/>
+          </p:nvSpPr>
+          <p:spPr>
+            <a:xfrm>
+              <a:off x="3913632" y="3236976"/>
+              <a:ext cx="1389888" cy="548640"/>
+            </a:xfrm>
+            <a:prstGeom prst="rect">
+              <a:avLst/>
+            </a:prstGeom>
+            <a:noFill/>
+            <a:ln/>
+          </p:spPr>
+          <p:txBody>
+            <a:bodyPr wrap="square" rtlCol="0" anchor="ctr"/>
+            <a:lstStyle/>
+            <a:p>
+              <a:pPr marL="0" indent="0">
+                <a:buNone/>
+              </a:pPr>
+              <a:r>
+                <a:rPr lang="en-US" sz="950" dirty="0">
+                  <a:solidFill>
+                    <a:srgbClr val="64748B"/>
+                  </a:solidFill>
+                  <a:latin typeface="Calibri" pitchFamily="34" charset="0"/>
+                  <a:ea typeface="Calibri" pitchFamily="34" charset="-122"/>
+                  <a:cs typeface="Calibri" pitchFamily="34" charset="-120"/>
+                </a:rPr>
+                <a:t>·  tab view</a:t>
+              </a:r>
+              <a:endParaRPr lang="en-US" sz="950" dirty="0"/>
+            </a:p>
+          </p:txBody>
+        </p:sp>
+        <p:sp>
+          <p:nvSpPr>
+            <p:cNvPr id="27" name="Text 25"/>
+            <p:cNvSpPr/>
+            <p:nvPr/>
+          </p:nvSpPr>
+          <p:spPr>
+            <a:xfrm>
+              <a:off x="3913632" y="3895344"/>
+              <a:ext cx="1389888" cy="548640"/>
+            </a:xfrm>
+            <a:prstGeom prst="rect">
+              <a:avLst/>
+            </a:prstGeom>
+            <a:noFill/>
+            <a:ln/>
+          </p:spPr>
+          <p:txBody>
+            <a:bodyPr wrap="square" rtlCol="0" anchor="ctr"/>
+            <a:lstStyle/>
+            <a:p>
+              <a:pPr marL="0" indent="0">
+                <a:buNone/>
+              </a:pPr>
+              <a:r>
+                <a:rPr lang="en-US" sz="950" dirty="0">
+                  <a:solidFill>
+                    <a:srgbClr val="64748B"/>
+                  </a:solidFill>
+                  <a:latin typeface="Calibri" pitchFamily="34" charset="0"/>
+                  <a:ea typeface="Calibri" pitchFamily="34" charset="-122"/>
+                  <a:cs typeface="Calibri" pitchFamily="34" charset="-120"/>
+                </a:rPr>
+                <a:t>· Drill-down modal</a:t>
+              </a:r>
+              <a:endParaRPr lang="en-US" sz="950" dirty="0"/>
+            </a:p>
+          </p:txBody>
+        </p:sp>
+      </p:grpSp>
       <p:sp>
         <p:nvSpPr>
           <p:cNvPr id="28" name="Shape 26"/>
@@ -7308,6 +7337,13 @@
             <a:prstDash val="solid"/>
           </a:ln>
         </p:spPr>
+        <p:txBody>
+          <a:bodyPr/>
+          <a:lstStyle/>
+          <a:p>
+            <a:endParaRPr lang="en-US"/>
+          </a:p>
+        </p:txBody>
       </p:sp>
       <p:sp>
         <p:nvSpPr>
@@ -7330,7 +7366,7 @@
           <a:bodyPr wrap="square" rtlCol="0" anchor="ctr"/>
           <a:lstStyle/>
           <a:p>
-            <a:pPr algn="ctr" indent="0" marL="0">
+            <a:pPr marL="0" indent="0" algn="ctr">
               <a:buNone/>
             </a:pPr>
             <a:r>
@@ -7372,13 +7408,20 @@
             <a:prstDash val="solid"/>
           </a:ln>
           <a:effectLst>
-            <a:outerShdw sx="100000" sy="100000" kx="0" ky="0" algn="bl" rotWithShape="0" blurRad="101600" dist="38100" dir="8100000">
+            <a:outerShdw blurRad="101600" dist="38100" dir="8100000" algn="bl" rotWithShape="0">
               <a:srgbClr val="000924">
                 <a:alpha val="10000"/>
               </a:srgbClr>
             </a:outerShdw>
           </a:effectLst>
         </p:spPr>
+        <p:txBody>
+          <a:bodyPr/>
+          <a:lstStyle/>
+          <a:p>
+            <a:endParaRPr lang="en-US"/>
+          </a:p>
+        </p:txBody>
       </p:sp>
       <p:sp>
         <p:nvSpPr>
@@ -7404,6 +7447,13 @@
             <a:prstDash val="solid"/>
           </a:ln>
         </p:spPr>
+        <p:txBody>
+          <a:bodyPr/>
+          <a:lstStyle/>
+          <a:p>
+            <a:endParaRPr lang="en-US"/>
+          </a:p>
+        </p:txBody>
       </p:sp>
       <p:sp>
         <p:nvSpPr>
@@ -7426,7 +7476,7 @@
           <a:bodyPr wrap="square" rtlCol="0" anchor="ctr"/>
           <a:lstStyle/>
           <a:p>
-            <a:pPr algn="ctr" indent="0" marL="0">
+            <a:pPr marL="0" indent="0" algn="ctr">
               <a:buNone/>
             </a:pPr>
             <a:r>
@@ -7465,7 +7515,7 @@
           <a:bodyPr wrap="square" rtlCol="0" anchor="ctr"/>
           <a:lstStyle/>
           <a:p>
-            <a:pPr indent="0" marL="0">
+            <a:pPr marL="0" indent="0">
               <a:buNone/>
             </a:pPr>
             <a:r>
@@ -7504,7 +7554,7 @@
           <a:bodyPr wrap="square" rtlCol="0" anchor="ctr"/>
           <a:lstStyle/>
           <a:p>
-            <a:pPr indent="0" marL="0">
+            <a:pPr marL="0" indent="0">
               <a:buNone/>
             </a:pPr>
             <a:r>
@@ -7543,7 +7593,7 @@
           <a:bodyPr wrap="square" rtlCol="0" anchor="ctr"/>
           <a:lstStyle/>
           <a:p>
-            <a:pPr indent="0" marL="0">
+            <a:pPr marL="0" indent="0">
               <a:buNone/>
             </a:pPr>
             <a:r>
@@ -7585,6 +7635,13 @@
             <a:prstDash val="solid"/>
           </a:ln>
         </p:spPr>
+        <p:txBody>
+          <a:bodyPr/>
+          <a:lstStyle/>
+          <a:p>
+            <a:endParaRPr lang="en-US"/>
+          </a:p>
+        </p:txBody>
       </p:sp>
       <p:sp>
         <p:nvSpPr>
@@ -7607,7 +7664,7 @@
           <a:bodyPr wrap="square" rtlCol="0" anchor="ctr"/>
           <a:lstStyle/>
           <a:p>
-            <a:pPr algn="ctr" indent="0" marL="0">
+            <a:pPr marL="0" indent="0" algn="ctr">
               <a:buNone/>
             </a:pPr>
             <a:r>
@@ -7649,13 +7706,20 @@
             <a:prstDash val="solid"/>
           </a:ln>
           <a:effectLst>
-            <a:outerShdw sx="100000" sy="100000" kx="0" ky="0" algn="bl" rotWithShape="0" blurRad="101600" dist="38100" dir="8100000">
+            <a:outerShdw blurRad="101600" dist="38100" dir="8100000" algn="bl" rotWithShape="0">
               <a:srgbClr val="000924">
                 <a:alpha val="10000"/>
               </a:srgbClr>
             </a:outerShdw>
           </a:effectLst>
         </p:spPr>
+        <p:txBody>
+          <a:bodyPr/>
+          <a:lstStyle/>
+          <a:p>
+            <a:endParaRPr lang="en-US"/>
+          </a:p>
+        </p:txBody>
       </p:sp>
       <p:sp>
         <p:nvSpPr>
@@ -7681,6 +7745,13 @@
             <a:prstDash val="solid"/>
           </a:ln>
         </p:spPr>
+        <p:txBody>
+          <a:bodyPr/>
+          <a:lstStyle/>
+          <a:p>
+            <a:endParaRPr lang="en-US"/>
+          </a:p>
+        </p:txBody>
       </p:sp>
       <p:sp>
         <p:nvSpPr>
@@ -7703,7 +7774,7 @@
           <a:bodyPr wrap="square" rtlCol="0" anchor="ctr"/>
           <a:lstStyle/>
           <a:p>
-            <a:pPr algn="ctr" indent="0" marL="0">
+            <a:pPr marL="0" indent="0" algn="ctr">
               <a:buNone/>
             </a:pPr>
             <a:r>
@@ -7742,7 +7813,7 @@
           <a:bodyPr wrap="square" rtlCol="0" anchor="ctr"/>
           <a:lstStyle/>
           <a:p>
-            <a:pPr indent="0" marL="0">
+            <a:pPr marL="0" indent="0">
               <a:buNone/>
             </a:pPr>
             <a:r>
@@ -7781,7 +7852,7 @@
           <a:bodyPr wrap="square" rtlCol="0" anchor="ctr"/>
           <a:lstStyle/>
           <a:p>
-            <a:pPr indent="0" marL="0">
+            <a:pPr marL="0" indent="0">
               <a:buNone/>
             </a:pPr>
             <a:r>
@@ -7820,7 +7891,7 @@
           <a:bodyPr wrap="square" rtlCol="0" anchor="ctr"/>
           <a:lstStyle/>
           <a:p>
-            <a:pPr indent="0" marL="0">
+            <a:pPr marL="0" indent="0">
               <a:buNone/>
             </a:pPr>
             <a:r>
@@ -7838,6 +7909,183 @@
           </a:p>
         </p:txBody>
       </p:sp>
+      <p:grpSp>
+        <p:nvGrpSpPr>
+          <p:cNvPr id="44" name="Group 43">
+            <a:extLst>
+              <a:ext uri="{FF2B5EF4-FFF2-40B4-BE49-F238E27FC236}">
+                <a16:creationId xmlns:a16="http://schemas.microsoft.com/office/drawing/2014/main" id="{E1801576-380F-351B-93E2-7772806103F4}"/>
+              </a:ext>
+            </a:extLst>
+          </p:cNvPr>
+          <p:cNvGrpSpPr/>
+          <p:nvPr/>
+        </p:nvGrpSpPr>
+        <p:grpSpPr>
+          <a:xfrm>
+            <a:off x="3913632" y="2121408"/>
+            <a:ext cx="1389888" cy="2359152"/>
+            <a:chOff x="2231136" y="2084832"/>
+            <a:chExt cx="1389888" cy="2359152"/>
+          </a:xfrm>
+        </p:grpSpPr>
+        <p:sp>
+          <p:nvSpPr>
+            <p:cNvPr id="16" name="Text 14"/>
+            <p:cNvSpPr/>
+            <p:nvPr/>
+          </p:nvSpPr>
+          <p:spPr>
+            <a:xfrm>
+              <a:off x="2231136" y="2084832"/>
+              <a:ext cx="1389888" cy="384048"/>
+            </a:xfrm>
+            <a:prstGeom prst="rect">
+              <a:avLst/>
+            </a:prstGeom>
+            <a:noFill/>
+            <a:ln/>
+          </p:spPr>
+          <p:txBody>
+            <a:bodyPr wrap="square" rtlCol="0" anchor="ctr"/>
+            <a:lstStyle/>
+            <a:p>
+              <a:pPr marL="0" indent="0" algn="ctr">
+                <a:buNone/>
+              </a:pPr>
+              <a:r>
+                <a:rPr lang="en-US" sz="1300" b="1" dirty="0">
+                  <a:solidFill>
+                    <a:srgbClr val="1B1B1E"/>
+                  </a:solidFill>
+                  <a:latin typeface="Calibri" pitchFamily="34" charset="0"/>
+                  <a:ea typeface="Calibri" pitchFamily="34" charset="-122"/>
+                  <a:cs typeface="Calibri" pitchFamily="34" charset="-120"/>
+                </a:rPr>
+                <a:t>Backend</a:t>
+              </a:r>
+              <a:endParaRPr lang="en-US" sz="1300" dirty="0"/>
+            </a:p>
+          </p:txBody>
+        </p:sp>
+        <p:sp>
+          <p:nvSpPr>
+            <p:cNvPr id="17" name="Text 15"/>
+            <p:cNvSpPr/>
+            <p:nvPr/>
+          </p:nvSpPr>
+          <p:spPr>
+            <a:xfrm>
+              <a:off x="2231136" y="2578608"/>
+              <a:ext cx="1389888" cy="548640"/>
+            </a:xfrm>
+            <a:prstGeom prst="rect">
+              <a:avLst/>
+            </a:prstGeom>
+            <a:noFill/>
+            <a:ln/>
+          </p:spPr>
+          <p:txBody>
+            <a:bodyPr wrap="square" rtlCol="0" anchor="ctr"/>
+            <a:lstStyle/>
+            <a:p>
+              <a:pPr marL="0" indent="0">
+                <a:buNone/>
+              </a:pPr>
+              <a:r>
+                <a:rPr lang="en-US" sz="950" dirty="0">
+                  <a:solidFill>
+                    <a:srgbClr val="64748B"/>
+                  </a:solidFill>
+                  <a:latin typeface="Calibri" pitchFamily="34" charset="0"/>
+                  <a:ea typeface="Calibri" pitchFamily="34" charset="-122"/>
+                  <a:cs typeface="Calibri" pitchFamily="34" charset="-120"/>
+                </a:rPr>
+                <a:t>· ERD &amp; schema</a:t>
+              </a:r>
+              <a:endParaRPr lang="en-US" sz="950" dirty="0"/>
+            </a:p>
+          </p:txBody>
+        </p:sp>
+        <p:sp>
+          <p:nvSpPr>
+            <p:cNvPr id="18" name="Text 16"/>
+            <p:cNvSpPr/>
+            <p:nvPr/>
+          </p:nvSpPr>
+          <p:spPr>
+            <a:xfrm>
+              <a:off x="2231136" y="3236976"/>
+              <a:ext cx="1389888" cy="548640"/>
+            </a:xfrm>
+            <a:prstGeom prst="rect">
+              <a:avLst/>
+            </a:prstGeom>
+            <a:noFill/>
+            <a:ln/>
+          </p:spPr>
+          <p:txBody>
+            <a:bodyPr wrap="square" rtlCol="0" anchor="ctr"/>
+            <a:lstStyle/>
+            <a:p>
+              <a:pPr marL="0" indent="0">
+                <a:buNone/>
+              </a:pPr>
+              <a:r>
+                <a:rPr lang="en-US" sz="950" dirty="0">
+                  <a:solidFill>
+                    <a:srgbClr val="64748B"/>
+                  </a:solidFill>
+                  <a:latin typeface="Calibri" pitchFamily="34" charset="0"/>
+                  <a:ea typeface="Calibri" pitchFamily="34" charset="-122"/>
+                  <a:cs typeface="Calibri" pitchFamily="34" charset="-120"/>
+                </a:rPr>
+                <a:t>· API routes</a:t>
+              </a:r>
+              <a:endParaRPr lang="en-US" sz="950" dirty="0"/>
+            </a:p>
+          </p:txBody>
+        </p:sp>
+        <p:sp>
+          <p:nvSpPr>
+            <p:cNvPr id="19" name="Text 17"/>
+            <p:cNvSpPr/>
+            <p:nvPr/>
+          </p:nvSpPr>
+          <p:spPr>
+            <a:xfrm>
+              <a:off x="2231136" y="3895344"/>
+              <a:ext cx="1389888" cy="548640"/>
+            </a:xfrm>
+            <a:prstGeom prst="rect">
+              <a:avLst/>
+            </a:prstGeom>
+            <a:noFill/>
+            <a:ln/>
+          </p:spPr>
+          <p:txBody>
+            <a:bodyPr wrap="square" rtlCol="0" anchor="ctr"/>
+            <a:lstStyle/>
+            <a:p>
+              <a:pPr marL="0" indent="0">
+                <a:buNone/>
+              </a:pPr>
+              <a:r>
+                <a:rPr lang="en-US" sz="950" dirty="0">
+                  <a:solidFill>
+                    <a:srgbClr val="64748B"/>
+                  </a:solidFill>
+                  <a:latin typeface="Calibri" pitchFamily="34" charset="0"/>
+                  <a:ea typeface="Calibri" pitchFamily="34" charset="-122"/>
+                  <a:cs typeface="Calibri" pitchFamily="34" charset="-120"/>
+                </a:rPr>
+                <a:t>· Koneksi ERP / data layer</a:t>
+              </a:r>
+              <a:endParaRPr lang="en-US" sz="950" dirty="0"/>
+            </a:p>
+          </p:txBody>
+        </p:sp>
+      </p:grpSp>
     </p:spTree>
   </p:cSld>
   <p:clrMapOvr>
@@ -7854,6 +8102,7 @@
         <a:solidFill>
           <a:srgbClr val="000924"/>
         </a:solidFill>
+        <a:effectLst/>
       </p:bgPr>
     </p:bg>
     <p:spTree>
@@ -7894,6 +8143,13 @@
             <a:prstDash val="solid"/>
           </a:ln>
         </p:spPr>
+        <p:txBody>
+          <a:bodyPr/>
+          <a:lstStyle/>
+          <a:p>
+            <a:endParaRPr lang="en-US"/>
+          </a:p>
+        </p:txBody>
       </p:sp>
       <p:sp>
         <p:nvSpPr>
@@ -7916,7 +8172,7 @@
           <a:bodyPr wrap="square" rtlCol="0" anchor="ctr"/>
           <a:lstStyle/>
           <a:p>
-            <a:pPr indent="0" marL="0">
+            <a:pPr marL="0" indent="0">
               <a:buNone/>
             </a:pPr>
             <a:r>
@@ -7955,7 +8211,7 @@
           <a:bodyPr wrap="square" rtlCol="0" anchor="ctr"/>
           <a:lstStyle/>
           <a:p>
-            <a:pPr indent="0" marL="0">
+            <a:pPr marL="0" indent="0">
               <a:buNone/>
             </a:pPr>
             <a:r>
@@ -7972,7 +8228,7 @@
             <a:endParaRPr lang="en-US" sz="4200" dirty="0"/>
           </a:p>
           <a:p>
-            <a:pPr indent="0" marL="0">
+            <a:pPr marL="0" indent="0">
               <a:buNone/>
             </a:pPr>
             <a:r>
@@ -7989,7 +8245,7 @@
             <a:endParaRPr lang="en-US" sz="4200" dirty="0"/>
           </a:p>
           <a:p>
-            <a:pPr indent="0" marL="0">
+            <a:pPr marL="0" indent="0">
               <a:buNone/>
             </a:pPr>
             <a:r>
@@ -8028,11 +8284,11 @@
           <a:bodyPr wrap="square" rtlCol="0" anchor="ctr"/>
           <a:lstStyle/>
           <a:p>
-            <a:pPr indent="0" marL="0">
-              <a:buNone/>
-            </a:pPr>
-            <a:r>
-              <a:rPr lang="en-US" sz="1100" spc="100" kern="0" dirty="0">
+            <a:pPr marL="0" indent="0">
+              <a:buNone/>
+            </a:pPr>
+            <a:r>
+              <a:rPr lang="en-US" sz="1100" kern="0" spc="100" dirty="0">
                 <a:solidFill>
                   <a:srgbClr val="FFFFFF"/>
                 </a:solidFill>
@@ -8347,4 +8603,319 @@
     </a:ext>
   </a:extLst>
 </a:theme>
+</file>
+
+<file path=ppt/theme/theme2.xml><?xml version="1.0" encoding="utf-8"?>
+<a:theme xmlns:a="http://schemas.openxmlformats.org/drawingml/2006/main" name="Office Theme">
+  <a:themeElements>
+    <a:clrScheme name="Office">
+      <a:dk1>
+        <a:sysClr val="windowText" lastClr="000000"/>
+      </a:dk1>
+      <a:lt1>
+        <a:sysClr val="window" lastClr="FFFFFF"/>
+      </a:lt1>
+      <a:dk2>
+        <a:srgbClr val="0E2841"/>
+      </a:dk2>
+      <a:lt2>
+        <a:srgbClr val="E8E8E8"/>
+      </a:lt2>
+      <a:accent1>
+        <a:srgbClr val="156082"/>
+      </a:accent1>
+      <a:accent2>
+        <a:srgbClr val="E97132"/>
+      </a:accent2>
+      <a:accent3>
+        <a:srgbClr val="196B24"/>
+      </a:accent3>
+      <a:accent4>
+        <a:srgbClr val="0F9ED5"/>
+      </a:accent4>
+      <a:accent5>
+        <a:srgbClr val="A02B93"/>
+      </a:accent5>
+      <a:accent6>
+        <a:srgbClr val="4EA72E"/>
+      </a:accent6>
+      <a:hlink>
+        <a:srgbClr val="467886"/>
+      </a:hlink>
+      <a:folHlink>
+        <a:srgbClr val="96607D"/>
+      </a:folHlink>
+    </a:clrScheme>
+    <a:fontScheme name="Office">
+      <a:majorFont>
+        <a:latin typeface="Aptos Display" panose="02110004020202020204"/>
+        <a:ea typeface=""/>
+        <a:cs typeface=""/>
+        <a:font script="Jpan" typeface="游ゴシック Light"/>
+        <a:font script="Hang" typeface="맑은 고딕"/>
+        <a:font script="Hans" typeface="等线 Light"/>
+        <a:font script="Hant" typeface="新細明體"/>
+        <a:font script="Arab" typeface="Times New Roman"/>
+        <a:font script="Hebr" typeface="Times New Roman"/>
+        <a:font script="Thai" typeface="Angsana New"/>
+        <a:font script="Ethi" typeface="Nyala"/>
+        <a:font script="Beng" typeface="Vrinda"/>
+        <a:font script="Gujr" typeface="Shruti"/>
+        <a:font script="Khmr" typeface="MoolBoran"/>
+        <a:font script="Knda" typeface="Tunga"/>
+        <a:font script="Guru" typeface="Raavi"/>
+        <a:font script="Cans" typeface="Euphemia"/>
+        <a:font script="Cher" typeface="Plantagenet Cherokee"/>
+        <a:font script="Yiii" typeface="Microsoft Yi Baiti"/>
+        <a:font script="Tibt" typeface="Microsoft Himalaya"/>
+        <a:font script="Thaa" typeface="MV Boli"/>
+        <a:font script="Deva" typeface="Mangal"/>
+        <a:font script="Telu" typeface="Gautami"/>
+        <a:font script="Taml" typeface="Latha"/>
+        <a:font script="Syrc" typeface="Estrangelo Edessa"/>
+        <a:font script="Orya" typeface="Kalinga"/>
+        <a:font script="Mlym" typeface="Kartika"/>
+        <a:font script="Laoo" typeface="DokChampa"/>
+        <a:font script="Sinh" typeface="Iskoola Pota"/>
+        <a:font script="Mong" typeface="Mongolian Baiti"/>
+        <a:font script="Viet" typeface="Times New Roman"/>
+        <a:font script="Uigh" typeface="Microsoft Uighur"/>
+        <a:font script="Geor" typeface="Sylfaen"/>
+        <a:font script="Armn" typeface="Arial"/>
+        <a:font script="Bugi" typeface="Leelawadee UI"/>
+        <a:font script="Bopo" typeface="Microsoft JhengHei"/>
+        <a:font script="Java" typeface="Javanese Text"/>
+        <a:font script="Lisu" typeface="Segoe UI"/>
+        <a:font script="Mymr" typeface="Myanmar Text"/>
+        <a:font script="Nkoo" typeface="Ebrima"/>
+        <a:font script="Olck" typeface="Nirmala UI"/>
+        <a:font script="Osma" typeface="Ebrima"/>
+        <a:font script="Phag" typeface="Phagspa"/>
+        <a:font script="Syrn" typeface="Estrangelo Edessa"/>
+        <a:font script="Syrj" typeface="Estrangelo Edessa"/>
+        <a:font script="Syre" typeface="Estrangelo Edessa"/>
+        <a:font script="Sora" typeface="Nirmala UI"/>
+        <a:font script="Tale" typeface="Microsoft Tai Le"/>
+        <a:font script="Talu" typeface="Microsoft New Tai Lue"/>
+        <a:font script="Tfng" typeface="Ebrima"/>
+      </a:majorFont>
+      <a:minorFont>
+        <a:latin typeface="Aptos" panose="02110004020202020204"/>
+        <a:ea typeface=""/>
+        <a:cs typeface=""/>
+        <a:font script="Jpan" typeface="游ゴシック"/>
+        <a:font script="Hang" typeface="맑은 고딕"/>
+        <a:font script="Hans" typeface="等线"/>
+        <a:font script="Hant" typeface="新細明體"/>
+        <a:font script="Arab" typeface="Arial"/>
+        <a:font script="Hebr" typeface="Arial"/>
+        <a:font script="Thai" typeface="Cordia New"/>
+        <a:font script="Ethi" typeface="Nyala"/>
+        <a:font script="Beng" typeface="Vrinda"/>
+        <a:font script="Gujr" typeface="Shruti"/>
+        <a:font script="Khmr" typeface="DaunPenh"/>
+        <a:font script="Knda" typeface="Tunga"/>
+        <a:font script="Guru" typeface="Raavi"/>
+        <a:font script="Cans" typeface="Euphemia"/>
+        <a:font script="Cher" typeface="Plantagenet Cherokee"/>
+        <a:font script="Yiii" typeface="Microsoft Yi Baiti"/>
+        <a:font script="Tibt" typeface="Microsoft Himalaya"/>
+        <a:font script="Thaa" typeface="MV Boli"/>
+        <a:font script="Deva" typeface="Mangal"/>
+        <a:font script="Telu" typeface="Gautami"/>
+        <a:font script="Taml" typeface="Latha"/>
+        <a:font script="Syrc" typeface="Estrangelo Edessa"/>
+        <a:font script="Orya" typeface="Kalinga"/>
+        <a:font script="Mlym" typeface="Kartika"/>
+        <a:font script="Laoo" typeface="DokChampa"/>
+        <a:font script="Sinh" typeface="Iskoola Pota"/>
+        <a:font script="Mong" typeface="Mongolian Baiti"/>
+        <a:font script="Viet" typeface="Arial"/>
+        <a:font script="Uigh" typeface="Microsoft Uighur"/>
+        <a:font script="Geor" typeface="Sylfaen"/>
+        <a:font script="Armn" typeface="Arial"/>
+        <a:font script="Bugi" typeface="Leelawadee UI"/>
+        <a:font script="Bopo" typeface="Microsoft JhengHei"/>
+        <a:font script="Java" typeface="Javanese Text"/>
+        <a:font script="Lisu" typeface="Segoe UI"/>
+        <a:font script="Mymr" typeface="Myanmar Text"/>
+        <a:font script="Nkoo" typeface="Ebrima"/>
+        <a:font script="Olck" typeface="Nirmala UI"/>
+        <a:font script="Osma" typeface="Ebrima"/>
+        <a:font script="Phag" typeface="Phagspa"/>
+        <a:font script="Syrn" typeface="Estrangelo Edessa"/>
+        <a:font script="Syrj" typeface="Estrangelo Edessa"/>
+        <a:font script="Syre" typeface="Estrangelo Edessa"/>
+        <a:font script="Sora" typeface="Nirmala UI"/>
+        <a:font script="Tale" typeface="Microsoft Tai Le"/>
+        <a:font script="Talu" typeface="Microsoft New Tai Lue"/>
+        <a:font script="Tfng" typeface="Ebrima"/>
+      </a:minorFont>
+    </a:fontScheme>
+    <a:fmtScheme name="Office">
+      <a:fillStyleLst>
+        <a:solidFill>
+          <a:schemeClr val="phClr"/>
+        </a:solidFill>
+        <a:gradFill rotWithShape="1">
+          <a:gsLst>
+            <a:gs pos="0">
+              <a:schemeClr val="phClr">
+                <a:lumMod val="110000"/>
+                <a:satMod val="105000"/>
+                <a:tint val="67000"/>
+              </a:schemeClr>
+            </a:gs>
+            <a:gs pos="50000">
+              <a:schemeClr val="phClr">
+                <a:lumMod val="105000"/>
+                <a:satMod val="103000"/>
+                <a:tint val="73000"/>
+              </a:schemeClr>
+            </a:gs>
+            <a:gs pos="100000">
+              <a:schemeClr val="phClr">
+                <a:lumMod val="105000"/>
+                <a:satMod val="109000"/>
+                <a:tint val="81000"/>
+              </a:schemeClr>
+            </a:gs>
+          </a:gsLst>
+          <a:lin ang="5400000" scaled="0"/>
+        </a:gradFill>
+        <a:gradFill rotWithShape="1">
+          <a:gsLst>
+            <a:gs pos="0">
+              <a:schemeClr val="phClr">
+                <a:satMod val="103000"/>
+                <a:lumMod val="102000"/>
+                <a:tint val="94000"/>
+              </a:schemeClr>
+            </a:gs>
+            <a:gs pos="50000">
+              <a:schemeClr val="phClr">
+                <a:satMod val="110000"/>
+                <a:lumMod val="100000"/>
+                <a:shade val="100000"/>
+              </a:schemeClr>
+            </a:gs>
+            <a:gs pos="100000">
+              <a:schemeClr val="phClr">
+                <a:lumMod val="99000"/>
+                <a:satMod val="120000"/>
+                <a:shade val="78000"/>
+              </a:schemeClr>
+            </a:gs>
+          </a:gsLst>
+          <a:lin ang="5400000" scaled="0"/>
+        </a:gradFill>
+      </a:fillStyleLst>
+      <a:lnStyleLst>
+        <a:ln w="12700" cap="flat" cmpd="sng" algn="ctr">
+          <a:solidFill>
+            <a:schemeClr val="phClr"/>
+          </a:solidFill>
+          <a:prstDash val="solid"/>
+          <a:miter lim="800000"/>
+        </a:ln>
+        <a:ln w="19050" cap="flat" cmpd="sng" algn="ctr">
+          <a:solidFill>
+            <a:schemeClr val="phClr"/>
+          </a:solidFill>
+          <a:prstDash val="solid"/>
+          <a:miter lim="800000"/>
+        </a:ln>
+        <a:ln w="25400" cap="flat" cmpd="sng" algn="ctr">
+          <a:solidFill>
+            <a:schemeClr val="phClr"/>
+          </a:solidFill>
+          <a:prstDash val="solid"/>
+          <a:miter lim="800000"/>
+        </a:ln>
+      </a:lnStyleLst>
+      <a:effectStyleLst>
+        <a:effectStyle>
+          <a:effectLst/>
+        </a:effectStyle>
+        <a:effectStyle>
+          <a:effectLst/>
+        </a:effectStyle>
+        <a:effectStyle>
+          <a:effectLst>
+            <a:outerShdw blurRad="57150" dist="19050" dir="5400000" algn="ctr" rotWithShape="0">
+              <a:srgbClr val="000000">
+                <a:alpha val="63000"/>
+              </a:srgbClr>
+            </a:outerShdw>
+          </a:effectLst>
+        </a:effectStyle>
+      </a:effectStyleLst>
+      <a:bgFillStyleLst>
+        <a:solidFill>
+          <a:schemeClr val="phClr"/>
+        </a:solidFill>
+        <a:solidFill>
+          <a:schemeClr val="phClr">
+            <a:tint val="95000"/>
+            <a:satMod val="170000"/>
+          </a:schemeClr>
+        </a:solidFill>
+        <a:gradFill rotWithShape="1">
+          <a:gsLst>
+            <a:gs pos="0">
+              <a:schemeClr val="phClr">
+                <a:tint val="93000"/>
+                <a:satMod val="150000"/>
+                <a:shade val="98000"/>
+                <a:lumMod val="102000"/>
+              </a:schemeClr>
+            </a:gs>
+            <a:gs pos="50000">
+              <a:schemeClr val="phClr">
+                <a:tint val="98000"/>
+                <a:satMod val="130000"/>
+                <a:shade val="90000"/>
+                <a:lumMod val="103000"/>
+              </a:schemeClr>
+            </a:gs>
+            <a:gs pos="100000">
+              <a:schemeClr val="phClr">
+                <a:shade val="63000"/>
+                <a:satMod val="120000"/>
+              </a:schemeClr>
+            </a:gs>
+          </a:gsLst>
+          <a:lin ang="5400000" scaled="0"/>
+        </a:gradFill>
+      </a:bgFillStyleLst>
+    </a:fmtScheme>
+  </a:themeElements>
+  <a:objectDefaults>
+    <a:lnDef>
+      <a:spPr/>
+      <a:bodyPr/>
+      <a:lstStyle/>
+      <a:style>
+        <a:lnRef idx="2">
+          <a:schemeClr val="accent1"/>
+        </a:lnRef>
+        <a:fillRef idx="0">
+          <a:schemeClr val="accent1"/>
+        </a:fillRef>
+        <a:effectRef idx="1">
+          <a:schemeClr val="accent1"/>
+        </a:effectRef>
+        <a:fontRef idx="minor">
+          <a:schemeClr val="tx1"/>
+        </a:fontRef>
+      </a:style>
+    </a:lnDef>
+  </a:objectDefaults>
+  <a:extraClrSchemeLst/>
+  <a:extLst>
+    <a:ext uri="{05A4C25C-085E-4340-85A3-A5531E510DB2}">
+      <thm15:themeFamily xmlns:thm15="http://schemas.microsoft.com/office/thememl/2012/main" name="Office Theme" id="{2E142A2C-CD16-42D6-873A-C26D2A0506FA}" vid="{1BDDFF52-6CD6-40A5-AB3C-68EB2F1E4D0A}"/>
+    </a:ext>
+  </a:extLst>
+</a:theme>
 </file>